--- a/public/fun/pack/pptx/birthday/돌잔치_21_성장기록중심_대나무숲.pptx
+++ b/public/fun/pack/pptx/birthday/돌잔치_21_성장기록중심_대나무숲.pptx
@@ -3347,7 +3347,7 @@
             <a:r>
               <a:rPr sz="4000" b="1" i="0">
                 <a:solidFill>
-                  <a:srgbClr val="1C3629"/>
+                  <a:srgbClr val="115F5B"/>
                 </a:solidFill>
               </a:rPr>
               <a:t>첫 번째 생일</a:t>
@@ -3385,7 +3385,7 @@
             <a:r>
               <a:rPr sz="1700" b="0" i="1">
                 <a:solidFill>
-                  <a:srgbClr val="1C3629"/>
+                  <a:srgbClr val="115F5B"/>
                 </a:solidFill>
               </a:rPr>
               <a:t>땀 흘리며 보낸 첫 여름을 지났습니다</a:t>
@@ -3487,7 +3487,7 @@
             <a:avLst/>
           </a:prstGeom>
           <a:solidFill>
-            <a:srgbClr val="D5ECE0"/>
+            <a:srgbClr val="D1FAF8"/>
           </a:solidFill>
           <a:ln>
             <a:noFill/>
@@ -3516,7 +3516,7 @@
             <a:avLst/>
           </a:prstGeom>
           <a:solidFill>
-            <a:srgbClr val="396F54"/>
+            <a:srgbClr val="26C5BD"/>
           </a:solidFill>
           <a:ln>
             <a:noFill/>
@@ -3560,7 +3560,7 @@
             <a:r>
               <a:rPr sz="3000" b="1" i="0">
                 <a:solidFill>
-                  <a:srgbClr val="1C3629"/>
+                  <a:srgbClr val="115F5B"/>
                 </a:solidFill>
               </a:rPr>
               <a:t>우리 아기를 소개합니다</a:t>
@@ -3585,11 +3585,11 @@
             </a:avLst>
           </a:prstGeom>
           <a:solidFill>
-            <a:srgbClr val="D5ECE0"/>
+            <a:srgbClr val="D1FAF8"/>
           </a:solidFill>
           <a:ln w="19050">
             <a:solidFill>
-              <a:srgbClr val="396F54"/>
+              <a:srgbClr val="26C5BD"/>
             </a:solidFill>
             <a:prstDash val="dash"/>
           </a:ln>
@@ -3608,7 +3608,7 @@
             <a:r>
               <a:rPr sz="1400" b="0" i="0">
                 <a:solidFill>
-                  <a:srgbClr val="1C3629"/>
+                  <a:srgbClr val="115F5B"/>
                 </a:solidFill>
               </a:rPr>
               <a:t>아기 사진을 넣어 주세요</a:t>
@@ -3648,7 +3648,7 @@
                       <a:r>
                         <a:rPr sz="1500" b="1">
                           <a:solidFill>
-                            <a:srgbClr val="1C3629"/>
+                            <a:srgbClr val="115F5B"/>
                           </a:solidFill>
                         </a:rPr>
                         <a:t>이름</a:t>
@@ -3658,30 +3658,30 @@
                   <a:tcPr anchor="ctr" marL="73152" marR="73152">
                     <a:lnL w="9525" cap="flat" cmpd="sng" algn="ctr">
                       <a:solidFill>
-                        <a:srgbClr val="D5ECE0"/>
+                        <a:srgbClr val="D1FAF8"/>
                       </a:solidFill>
                       <a:prstDash val="solid"/>
                     </a:lnL>
                     <a:lnR w="9525" cap="flat" cmpd="sng" algn="ctr">
                       <a:solidFill>
-                        <a:srgbClr val="D5ECE0"/>
+                        <a:srgbClr val="D1FAF8"/>
                       </a:solidFill>
                       <a:prstDash val="solid"/>
                     </a:lnR>
                     <a:lnT w="9525" cap="flat" cmpd="sng" algn="ctr">
                       <a:solidFill>
-                        <a:srgbClr val="D5ECE0"/>
+                        <a:srgbClr val="D1FAF8"/>
                       </a:solidFill>
                       <a:prstDash val="solid"/>
                     </a:lnT>
                     <a:lnB w="9525" cap="flat" cmpd="sng" algn="ctr">
                       <a:solidFill>
-                        <a:srgbClr val="D5ECE0"/>
+                        <a:srgbClr val="D1FAF8"/>
                       </a:solidFill>
                       <a:prstDash val="solid"/>
                     </a:lnB>
                     <a:solidFill>
-                      <a:srgbClr val="D5ECE0"/>
+                      <a:srgbClr val="D1FAF8"/>
                     </a:solidFill>
                   </a:tcPr>
                 </a:tc>
@@ -3704,30 +3704,30 @@
                   <a:tcPr anchor="ctr" marL="73152" marR="73152">
                     <a:lnL w="9525" cap="flat" cmpd="sng" algn="ctr">
                       <a:solidFill>
-                        <a:srgbClr val="D5ECE0"/>
+                        <a:srgbClr val="D1FAF8"/>
                       </a:solidFill>
                       <a:prstDash val="solid"/>
                     </a:lnL>
                     <a:lnR w="9525" cap="flat" cmpd="sng" algn="ctr">
                       <a:solidFill>
-                        <a:srgbClr val="D5ECE0"/>
+                        <a:srgbClr val="D1FAF8"/>
                       </a:solidFill>
                       <a:prstDash val="solid"/>
                     </a:lnR>
                     <a:lnT w="9525" cap="flat" cmpd="sng" algn="ctr">
                       <a:solidFill>
-                        <a:srgbClr val="D5ECE0"/>
+                        <a:srgbClr val="D1FAF8"/>
                       </a:solidFill>
                       <a:prstDash val="solid"/>
                     </a:lnT>
                     <a:lnB w="9525" cap="flat" cmpd="sng" algn="ctr">
                       <a:solidFill>
-                        <a:srgbClr val="D5ECE0"/>
+                        <a:srgbClr val="D1FAF8"/>
                       </a:solidFill>
                       <a:prstDash val="solid"/>
                     </a:lnB>
                     <a:solidFill>
-                      <a:srgbClr val="F2F8F5"/>
+                      <a:srgbClr val="EEFCFB"/>
                     </a:solidFill>
                   </a:tcPr>
                 </a:tc>
@@ -3742,7 +3742,7 @@
                       <a:r>
                         <a:rPr sz="1500" b="1">
                           <a:solidFill>
-                            <a:srgbClr val="1C3629"/>
+                            <a:srgbClr val="115F5B"/>
                           </a:solidFill>
                         </a:rPr>
                         <a:t>생일</a:t>
@@ -3752,30 +3752,30 @@
                   <a:tcPr anchor="ctr" marL="73152" marR="73152">
                     <a:lnL w="9525" cap="flat" cmpd="sng" algn="ctr">
                       <a:solidFill>
-                        <a:srgbClr val="D5ECE0"/>
+                        <a:srgbClr val="D1FAF8"/>
                       </a:solidFill>
                       <a:prstDash val="solid"/>
                     </a:lnL>
                     <a:lnR w="9525" cap="flat" cmpd="sng" algn="ctr">
                       <a:solidFill>
-                        <a:srgbClr val="D5ECE0"/>
+                        <a:srgbClr val="D1FAF8"/>
                       </a:solidFill>
                       <a:prstDash val="solid"/>
                     </a:lnR>
                     <a:lnT w="9525" cap="flat" cmpd="sng" algn="ctr">
                       <a:solidFill>
-                        <a:srgbClr val="D5ECE0"/>
+                        <a:srgbClr val="D1FAF8"/>
                       </a:solidFill>
                       <a:prstDash val="solid"/>
                     </a:lnT>
                     <a:lnB w="9525" cap="flat" cmpd="sng" algn="ctr">
                       <a:solidFill>
-                        <a:srgbClr val="D5ECE0"/>
+                        <a:srgbClr val="D1FAF8"/>
                       </a:solidFill>
                       <a:prstDash val="solid"/>
                     </a:lnB>
                     <a:solidFill>
-                      <a:srgbClr val="D5ECE0"/>
+                      <a:srgbClr val="D1FAF8"/>
                     </a:solidFill>
                   </a:tcPr>
                 </a:tc>
@@ -3798,25 +3798,25 @@
                   <a:tcPr anchor="ctr" marL="73152" marR="73152">
                     <a:lnL w="9525" cap="flat" cmpd="sng" algn="ctr">
                       <a:solidFill>
-                        <a:srgbClr val="D5ECE0"/>
+                        <a:srgbClr val="D1FAF8"/>
                       </a:solidFill>
                       <a:prstDash val="solid"/>
                     </a:lnL>
                     <a:lnR w="9525" cap="flat" cmpd="sng" algn="ctr">
                       <a:solidFill>
-                        <a:srgbClr val="D5ECE0"/>
+                        <a:srgbClr val="D1FAF8"/>
                       </a:solidFill>
                       <a:prstDash val="solid"/>
                     </a:lnR>
                     <a:lnT w="9525" cap="flat" cmpd="sng" algn="ctr">
                       <a:solidFill>
-                        <a:srgbClr val="D5ECE0"/>
+                        <a:srgbClr val="D1FAF8"/>
                       </a:solidFill>
                       <a:prstDash val="solid"/>
                     </a:lnT>
                     <a:lnB w="9525" cap="flat" cmpd="sng" algn="ctr">
                       <a:solidFill>
-                        <a:srgbClr val="D5ECE0"/>
+                        <a:srgbClr val="D1FAF8"/>
                       </a:solidFill>
                       <a:prstDash val="solid"/>
                     </a:lnB>
@@ -3836,7 +3836,7 @@
                       <a:r>
                         <a:rPr sz="1500" b="1">
                           <a:solidFill>
-                            <a:srgbClr val="1C3629"/>
+                            <a:srgbClr val="115F5B"/>
                           </a:solidFill>
                         </a:rPr>
                         <a:t>키 · 몸무게</a:t>
@@ -3846,30 +3846,30 @@
                   <a:tcPr anchor="ctr" marL="73152" marR="73152">
                     <a:lnL w="9525" cap="flat" cmpd="sng" algn="ctr">
                       <a:solidFill>
-                        <a:srgbClr val="D5ECE0"/>
+                        <a:srgbClr val="D1FAF8"/>
                       </a:solidFill>
                       <a:prstDash val="solid"/>
                     </a:lnL>
                     <a:lnR w="9525" cap="flat" cmpd="sng" algn="ctr">
                       <a:solidFill>
-                        <a:srgbClr val="D5ECE0"/>
+                        <a:srgbClr val="D1FAF8"/>
                       </a:solidFill>
                       <a:prstDash val="solid"/>
                     </a:lnR>
                     <a:lnT w="9525" cap="flat" cmpd="sng" algn="ctr">
                       <a:solidFill>
-                        <a:srgbClr val="D5ECE0"/>
+                        <a:srgbClr val="D1FAF8"/>
                       </a:solidFill>
                       <a:prstDash val="solid"/>
                     </a:lnT>
                     <a:lnB w="9525" cap="flat" cmpd="sng" algn="ctr">
                       <a:solidFill>
-                        <a:srgbClr val="D5ECE0"/>
+                        <a:srgbClr val="D1FAF8"/>
                       </a:solidFill>
                       <a:prstDash val="solid"/>
                     </a:lnB>
                     <a:solidFill>
-                      <a:srgbClr val="D5ECE0"/>
+                      <a:srgbClr val="D1FAF8"/>
                     </a:solidFill>
                   </a:tcPr>
                 </a:tc>
@@ -3892,30 +3892,30 @@
                   <a:tcPr anchor="ctr" marL="73152" marR="73152">
                     <a:lnL w="9525" cap="flat" cmpd="sng" algn="ctr">
                       <a:solidFill>
-                        <a:srgbClr val="D5ECE0"/>
+                        <a:srgbClr val="D1FAF8"/>
                       </a:solidFill>
                       <a:prstDash val="solid"/>
                     </a:lnL>
                     <a:lnR w="9525" cap="flat" cmpd="sng" algn="ctr">
                       <a:solidFill>
-                        <a:srgbClr val="D5ECE0"/>
+                        <a:srgbClr val="D1FAF8"/>
                       </a:solidFill>
                       <a:prstDash val="solid"/>
                     </a:lnR>
                     <a:lnT w="9525" cap="flat" cmpd="sng" algn="ctr">
                       <a:solidFill>
-                        <a:srgbClr val="D5ECE0"/>
+                        <a:srgbClr val="D1FAF8"/>
                       </a:solidFill>
                       <a:prstDash val="solid"/>
                     </a:lnT>
                     <a:lnB w="9525" cap="flat" cmpd="sng" algn="ctr">
                       <a:solidFill>
-                        <a:srgbClr val="D5ECE0"/>
+                        <a:srgbClr val="D1FAF8"/>
                       </a:solidFill>
                       <a:prstDash val="solid"/>
                     </a:lnB>
                     <a:solidFill>
-                      <a:srgbClr val="F2F8F5"/>
+                      <a:srgbClr val="EEFCFB"/>
                     </a:solidFill>
                   </a:tcPr>
                 </a:tc>
@@ -3930,7 +3930,7 @@
                       <a:r>
                         <a:rPr sz="1500" b="1">
                           <a:solidFill>
-                            <a:srgbClr val="1C3629"/>
+                            <a:srgbClr val="115F5B"/>
                           </a:solidFill>
                         </a:rPr>
                         <a:t>좋아하는 것</a:t>
@@ -3940,30 +3940,30 @@
                   <a:tcPr anchor="ctr" marL="73152" marR="73152">
                     <a:lnL w="9525" cap="flat" cmpd="sng" algn="ctr">
                       <a:solidFill>
-                        <a:srgbClr val="D5ECE0"/>
+                        <a:srgbClr val="D1FAF8"/>
                       </a:solidFill>
                       <a:prstDash val="solid"/>
                     </a:lnL>
                     <a:lnR w="9525" cap="flat" cmpd="sng" algn="ctr">
                       <a:solidFill>
-                        <a:srgbClr val="D5ECE0"/>
+                        <a:srgbClr val="D1FAF8"/>
                       </a:solidFill>
                       <a:prstDash val="solid"/>
                     </a:lnR>
                     <a:lnT w="9525" cap="flat" cmpd="sng" algn="ctr">
                       <a:solidFill>
-                        <a:srgbClr val="D5ECE0"/>
+                        <a:srgbClr val="D1FAF8"/>
                       </a:solidFill>
                       <a:prstDash val="solid"/>
                     </a:lnT>
                     <a:lnB w="9525" cap="flat" cmpd="sng" algn="ctr">
                       <a:solidFill>
-                        <a:srgbClr val="D5ECE0"/>
+                        <a:srgbClr val="D1FAF8"/>
                       </a:solidFill>
                       <a:prstDash val="solid"/>
                     </a:lnB>
                     <a:solidFill>
-                      <a:srgbClr val="D5ECE0"/>
+                      <a:srgbClr val="D1FAF8"/>
                     </a:solidFill>
                   </a:tcPr>
                 </a:tc>
@@ -3986,25 +3986,25 @@
                   <a:tcPr anchor="ctr" marL="73152" marR="73152">
                     <a:lnL w="9525" cap="flat" cmpd="sng" algn="ctr">
                       <a:solidFill>
-                        <a:srgbClr val="D5ECE0"/>
+                        <a:srgbClr val="D1FAF8"/>
                       </a:solidFill>
                       <a:prstDash val="solid"/>
                     </a:lnL>
                     <a:lnR w="9525" cap="flat" cmpd="sng" algn="ctr">
                       <a:solidFill>
-                        <a:srgbClr val="D5ECE0"/>
+                        <a:srgbClr val="D1FAF8"/>
                       </a:solidFill>
                       <a:prstDash val="solid"/>
                     </a:lnR>
                     <a:lnT w="9525" cap="flat" cmpd="sng" algn="ctr">
                       <a:solidFill>
-                        <a:srgbClr val="D5ECE0"/>
+                        <a:srgbClr val="D1FAF8"/>
                       </a:solidFill>
                       <a:prstDash val="solid"/>
                     </a:lnT>
                     <a:lnB w="9525" cap="flat" cmpd="sng" algn="ctr">
                       <a:solidFill>
-                        <a:srgbClr val="D5ECE0"/>
+                        <a:srgbClr val="D1FAF8"/>
                       </a:solidFill>
                       <a:prstDash val="solid"/>
                     </a:lnB>
@@ -4024,7 +4024,7 @@
                       <a:r>
                         <a:rPr sz="1500" b="1">
                           <a:solidFill>
-                            <a:srgbClr val="1C3629"/>
+                            <a:srgbClr val="115F5B"/>
                           </a:solidFill>
                         </a:rPr>
                         <a:t>별명</a:t>
@@ -4034,30 +4034,30 @@
                   <a:tcPr anchor="ctr" marL="73152" marR="73152">
                     <a:lnL w="9525" cap="flat" cmpd="sng" algn="ctr">
                       <a:solidFill>
-                        <a:srgbClr val="D5ECE0"/>
+                        <a:srgbClr val="D1FAF8"/>
                       </a:solidFill>
                       <a:prstDash val="solid"/>
                     </a:lnL>
                     <a:lnR w="9525" cap="flat" cmpd="sng" algn="ctr">
                       <a:solidFill>
-                        <a:srgbClr val="D5ECE0"/>
+                        <a:srgbClr val="D1FAF8"/>
                       </a:solidFill>
                       <a:prstDash val="solid"/>
                     </a:lnR>
                     <a:lnT w="9525" cap="flat" cmpd="sng" algn="ctr">
                       <a:solidFill>
-                        <a:srgbClr val="D5ECE0"/>
+                        <a:srgbClr val="D1FAF8"/>
                       </a:solidFill>
                       <a:prstDash val="solid"/>
                     </a:lnT>
                     <a:lnB w="9525" cap="flat" cmpd="sng" algn="ctr">
                       <a:solidFill>
-                        <a:srgbClr val="D5ECE0"/>
+                        <a:srgbClr val="D1FAF8"/>
                       </a:solidFill>
                       <a:prstDash val="solid"/>
                     </a:lnB>
                     <a:solidFill>
-                      <a:srgbClr val="D5ECE0"/>
+                      <a:srgbClr val="D1FAF8"/>
                     </a:solidFill>
                   </a:tcPr>
                 </a:tc>
@@ -4080,30 +4080,30 @@
                   <a:tcPr anchor="ctr" marL="73152" marR="73152">
                     <a:lnL w="9525" cap="flat" cmpd="sng" algn="ctr">
                       <a:solidFill>
-                        <a:srgbClr val="D5ECE0"/>
+                        <a:srgbClr val="D1FAF8"/>
                       </a:solidFill>
                       <a:prstDash val="solid"/>
                     </a:lnL>
                     <a:lnR w="9525" cap="flat" cmpd="sng" algn="ctr">
                       <a:solidFill>
-                        <a:srgbClr val="D5ECE0"/>
+                        <a:srgbClr val="D1FAF8"/>
                       </a:solidFill>
                       <a:prstDash val="solid"/>
                     </a:lnR>
                     <a:lnT w="9525" cap="flat" cmpd="sng" algn="ctr">
                       <a:solidFill>
-                        <a:srgbClr val="D5ECE0"/>
+                        <a:srgbClr val="D1FAF8"/>
                       </a:solidFill>
                       <a:prstDash val="solid"/>
                     </a:lnT>
                     <a:lnB w="9525" cap="flat" cmpd="sng" algn="ctr">
                       <a:solidFill>
-                        <a:srgbClr val="D5ECE0"/>
+                        <a:srgbClr val="D1FAF8"/>
                       </a:solidFill>
                       <a:prstDash val="solid"/>
                     </a:lnB>
                     <a:solidFill>
-                      <a:srgbClr val="F2F8F5"/>
+                      <a:srgbClr val="EEFCFB"/>
                     </a:solidFill>
                   </a:tcPr>
                 </a:tc>
@@ -4118,7 +4118,7 @@
                       <a:r>
                         <a:rPr sz="1500" b="1">
                           <a:solidFill>
-                            <a:srgbClr val="1C3629"/>
+                            <a:srgbClr val="115F5B"/>
                           </a:solidFill>
                         </a:rPr>
                         <a:t>부모의 마음</a:t>
@@ -4128,30 +4128,30 @@
                   <a:tcPr anchor="ctr" marL="73152" marR="73152">
                     <a:lnL w="9525" cap="flat" cmpd="sng" algn="ctr">
                       <a:solidFill>
-                        <a:srgbClr val="D5ECE0"/>
+                        <a:srgbClr val="D1FAF8"/>
                       </a:solidFill>
                       <a:prstDash val="solid"/>
                     </a:lnL>
                     <a:lnR w="9525" cap="flat" cmpd="sng" algn="ctr">
                       <a:solidFill>
-                        <a:srgbClr val="D5ECE0"/>
+                        <a:srgbClr val="D1FAF8"/>
                       </a:solidFill>
                       <a:prstDash val="solid"/>
                     </a:lnR>
                     <a:lnT w="9525" cap="flat" cmpd="sng" algn="ctr">
                       <a:solidFill>
-                        <a:srgbClr val="D5ECE0"/>
+                        <a:srgbClr val="D1FAF8"/>
                       </a:solidFill>
                       <a:prstDash val="solid"/>
                     </a:lnT>
                     <a:lnB w="9525" cap="flat" cmpd="sng" algn="ctr">
                       <a:solidFill>
-                        <a:srgbClr val="D5ECE0"/>
+                        <a:srgbClr val="D1FAF8"/>
                       </a:solidFill>
                       <a:prstDash val="solid"/>
                     </a:lnB>
                     <a:solidFill>
-                      <a:srgbClr val="D5ECE0"/>
+                      <a:srgbClr val="D1FAF8"/>
                     </a:solidFill>
                   </a:tcPr>
                 </a:tc>
@@ -4174,25 +4174,25 @@
                   <a:tcPr anchor="ctr" marL="73152" marR="73152">
                     <a:lnL w="9525" cap="flat" cmpd="sng" algn="ctr">
                       <a:solidFill>
-                        <a:srgbClr val="D5ECE0"/>
+                        <a:srgbClr val="D1FAF8"/>
                       </a:solidFill>
                       <a:prstDash val="solid"/>
                     </a:lnL>
                     <a:lnR w="9525" cap="flat" cmpd="sng" algn="ctr">
                       <a:solidFill>
-                        <a:srgbClr val="D5ECE0"/>
+                        <a:srgbClr val="D1FAF8"/>
                       </a:solidFill>
                       <a:prstDash val="solid"/>
                     </a:lnR>
                     <a:lnT w="9525" cap="flat" cmpd="sng" algn="ctr">
                       <a:solidFill>
-                        <a:srgbClr val="D5ECE0"/>
+                        <a:srgbClr val="D1FAF8"/>
                       </a:solidFill>
                       <a:prstDash val="solid"/>
                     </a:lnT>
                     <a:lnB w="9525" cap="flat" cmpd="sng" algn="ctr">
                       <a:solidFill>
-                        <a:srgbClr val="D5ECE0"/>
+                        <a:srgbClr val="D1FAF8"/>
                       </a:solidFill>
                       <a:prstDash val="solid"/>
                     </a:lnB>
@@ -4247,7 +4247,7 @@
             <a:avLst/>
           </a:prstGeom>
           <a:solidFill>
-            <a:srgbClr val="D5ECE0"/>
+            <a:srgbClr val="D1FAF8"/>
           </a:solidFill>
           <a:ln>
             <a:noFill/>
@@ -4276,7 +4276,7 @@
             <a:avLst/>
           </a:prstGeom>
           <a:solidFill>
-            <a:srgbClr val="396F54"/>
+            <a:srgbClr val="26C5BD"/>
           </a:solidFill>
           <a:ln>
             <a:noFill/>
@@ -4320,7 +4320,7 @@
             <a:r>
               <a:rPr sz="3000" b="1" i="0">
                 <a:solidFill>
-                  <a:srgbClr val="1C3629"/>
+                  <a:srgbClr val="115F5B"/>
                 </a:solidFill>
               </a:rPr>
               <a:t>한 해 성장 기록</a:t>
@@ -4343,7 +4343,7 @@
             <a:avLst/>
           </a:prstGeom>
           <a:solidFill>
-            <a:srgbClr val="D5ECE0"/>
+            <a:srgbClr val="D1FAF8"/>
           </a:solidFill>
           <a:ln>
             <a:noFill/>
@@ -4372,7 +4372,7 @@
             <a:avLst/>
           </a:prstGeom>
           <a:solidFill>
-            <a:srgbClr val="396F54"/>
+            <a:srgbClr val="26C5BD"/>
           </a:solidFill>
           <a:ln w="38100">
             <a:solidFill>
@@ -4418,7 +4418,7 @@
             <a:r>
               <a:rPr sz="1400" b="1" i="0">
                 <a:solidFill>
-                  <a:srgbClr val="396F54"/>
+                  <a:srgbClr val="26C5BD"/>
                 </a:solidFill>
               </a:rPr>
               <a:t>1개월</a:t>
@@ -4456,7 +4456,7 @@
             <a:r>
               <a:rPr sz="1600" b="1" i="0">
                 <a:solidFill>
-                  <a:srgbClr val="1C3629"/>
+                  <a:srgbClr val="115F5B"/>
                 </a:solidFill>
               </a:rPr>
               <a:t>처음 눈을 맞춘 날</a:t>
@@ -4517,7 +4517,7 @@
             <a:avLst/>
           </a:prstGeom>
           <a:solidFill>
-            <a:srgbClr val="396F54"/>
+            <a:srgbClr val="26C5BD"/>
           </a:solidFill>
           <a:ln w="38100">
             <a:solidFill>
@@ -4563,7 +4563,7 @@
             <a:r>
               <a:rPr sz="1400" b="1" i="0">
                 <a:solidFill>
-                  <a:srgbClr val="396F54"/>
+                  <a:srgbClr val="26C5BD"/>
                 </a:solidFill>
               </a:rPr>
               <a:t>3개월</a:t>
@@ -4601,7 +4601,7 @@
             <a:r>
               <a:rPr sz="1600" b="1" i="0">
                 <a:solidFill>
-                  <a:srgbClr val="1C3629"/>
+                  <a:srgbClr val="115F5B"/>
                 </a:solidFill>
               </a:rPr>
               <a:t>처음 웃은 날</a:t>
@@ -4662,7 +4662,7 @@
             <a:avLst/>
           </a:prstGeom>
           <a:solidFill>
-            <a:srgbClr val="396F54"/>
+            <a:srgbClr val="26C5BD"/>
           </a:solidFill>
           <a:ln w="38100">
             <a:solidFill>
@@ -4708,7 +4708,7 @@
             <a:r>
               <a:rPr sz="1400" b="1" i="0">
                 <a:solidFill>
-                  <a:srgbClr val="396F54"/>
+                  <a:srgbClr val="26C5BD"/>
                 </a:solidFill>
               </a:rPr>
               <a:t>6개월</a:t>
@@ -4746,7 +4746,7 @@
             <a:r>
               <a:rPr sz="1600" b="1" i="0">
                 <a:solidFill>
-                  <a:srgbClr val="1C3629"/>
+                  <a:srgbClr val="115F5B"/>
                 </a:solidFill>
               </a:rPr>
               <a:t>뒤집기 성공</a:t>
@@ -4807,7 +4807,7 @@
             <a:avLst/>
           </a:prstGeom>
           <a:solidFill>
-            <a:srgbClr val="396F54"/>
+            <a:srgbClr val="26C5BD"/>
           </a:solidFill>
           <a:ln w="38100">
             <a:solidFill>
@@ -4853,7 +4853,7 @@
             <a:r>
               <a:rPr sz="1400" b="1" i="0">
                 <a:solidFill>
-                  <a:srgbClr val="396F54"/>
+                  <a:srgbClr val="26C5BD"/>
                 </a:solidFill>
               </a:rPr>
               <a:t>9개월</a:t>
@@ -4891,7 +4891,7 @@
             <a:r>
               <a:rPr sz="1600" b="1" i="0">
                 <a:solidFill>
-                  <a:srgbClr val="1C3629"/>
+                  <a:srgbClr val="115F5B"/>
                 </a:solidFill>
               </a:rPr>
               <a:t>첫 이유식</a:t>
@@ -4952,7 +4952,7 @@
             <a:avLst/>
           </a:prstGeom>
           <a:solidFill>
-            <a:srgbClr val="396F54"/>
+            <a:srgbClr val="26C5BD"/>
           </a:solidFill>
           <a:ln w="38100">
             <a:solidFill>
@@ -4998,7 +4998,7 @@
             <a:r>
               <a:rPr sz="1400" b="1" i="0">
                 <a:solidFill>
-                  <a:srgbClr val="396F54"/>
+                  <a:srgbClr val="26C5BD"/>
                 </a:solidFill>
               </a:rPr>
               <a:t>12개월</a:t>
@@ -5036,7 +5036,7 @@
             <a:r>
               <a:rPr sz="1600" b="1" i="0">
                 <a:solidFill>
-                  <a:srgbClr val="1C3629"/>
+                  <a:srgbClr val="115F5B"/>
                 </a:solidFill>
               </a:rPr>
               <a:t>첫 걸음</a:t>
@@ -5123,7 +5123,7 @@
             <a:avLst/>
           </a:prstGeom>
           <a:solidFill>
-            <a:srgbClr val="D5ECE0"/>
+            <a:srgbClr val="D1FAF8"/>
           </a:solidFill>
           <a:ln>
             <a:noFill/>
@@ -5152,7 +5152,7 @@
             <a:avLst/>
           </a:prstGeom>
           <a:solidFill>
-            <a:srgbClr val="396F54"/>
+            <a:srgbClr val="26C5BD"/>
           </a:solidFill>
           <a:ln>
             <a:noFill/>
@@ -5196,7 +5196,7 @@
             <a:r>
               <a:rPr sz="3000" b="1" i="0">
                 <a:solidFill>
-                  <a:srgbClr val="1C3629"/>
+                  <a:srgbClr val="115F5B"/>
                 </a:solidFill>
               </a:rPr>
               <a:t>키와 몸무게</a:t>
@@ -5249,30 +5249,30 @@
                   <a:tcPr anchor="ctr" marL="73152" marR="73152">
                     <a:lnL w="9525" cap="flat" cmpd="sng" algn="ctr">
                       <a:solidFill>
-                        <a:srgbClr val="396F54"/>
+                        <a:srgbClr val="26C5BD"/>
                       </a:solidFill>
                       <a:prstDash val="solid"/>
                     </a:lnL>
                     <a:lnR w="9525" cap="flat" cmpd="sng" algn="ctr">
                       <a:solidFill>
-                        <a:srgbClr val="396F54"/>
+                        <a:srgbClr val="26C5BD"/>
                       </a:solidFill>
                       <a:prstDash val="solid"/>
                     </a:lnR>
                     <a:lnT w="9525" cap="flat" cmpd="sng" algn="ctr">
                       <a:solidFill>
-                        <a:srgbClr val="396F54"/>
+                        <a:srgbClr val="26C5BD"/>
                       </a:solidFill>
                       <a:prstDash val="solid"/>
                     </a:lnT>
                     <a:lnB w="9525" cap="flat" cmpd="sng" algn="ctr">
                       <a:solidFill>
-                        <a:srgbClr val="396F54"/>
+                        <a:srgbClr val="26C5BD"/>
                       </a:solidFill>
                       <a:prstDash val="solid"/>
                     </a:lnB>
                     <a:solidFill>
-                      <a:srgbClr val="396F54"/>
+                      <a:srgbClr val="26C5BD"/>
                     </a:solidFill>
                   </a:tcPr>
                 </a:tc>
@@ -5295,30 +5295,30 @@
                   <a:tcPr anchor="ctr" marL="73152" marR="73152">
                     <a:lnL w="9525" cap="flat" cmpd="sng" algn="ctr">
                       <a:solidFill>
-                        <a:srgbClr val="396F54"/>
+                        <a:srgbClr val="26C5BD"/>
                       </a:solidFill>
                       <a:prstDash val="solid"/>
                     </a:lnL>
                     <a:lnR w="9525" cap="flat" cmpd="sng" algn="ctr">
                       <a:solidFill>
-                        <a:srgbClr val="396F54"/>
+                        <a:srgbClr val="26C5BD"/>
                       </a:solidFill>
                       <a:prstDash val="solid"/>
                     </a:lnR>
                     <a:lnT w="9525" cap="flat" cmpd="sng" algn="ctr">
                       <a:solidFill>
-                        <a:srgbClr val="396F54"/>
+                        <a:srgbClr val="26C5BD"/>
                       </a:solidFill>
                       <a:prstDash val="solid"/>
                     </a:lnT>
                     <a:lnB w="9525" cap="flat" cmpd="sng" algn="ctr">
                       <a:solidFill>
-                        <a:srgbClr val="396F54"/>
+                        <a:srgbClr val="26C5BD"/>
                       </a:solidFill>
                       <a:prstDash val="solid"/>
                     </a:lnB>
                     <a:solidFill>
-                      <a:srgbClr val="396F54"/>
+                      <a:srgbClr val="26C5BD"/>
                     </a:solidFill>
                   </a:tcPr>
                 </a:tc>
@@ -5341,30 +5341,30 @@
                   <a:tcPr anchor="ctr" marL="73152" marR="73152">
                     <a:lnL w="9525" cap="flat" cmpd="sng" algn="ctr">
                       <a:solidFill>
-                        <a:srgbClr val="396F54"/>
+                        <a:srgbClr val="26C5BD"/>
                       </a:solidFill>
                       <a:prstDash val="solid"/>
                     </a:lnL>
                     <a:lnR w="9525" cap="flat" cmpd="sng" algn="ctr">
                       <a:solidFill>
-                        <a:srgbClr val="396F54"/>
+                        <a:srgbClr val="26C5BD"/>
                       </a:solidFill>
                       <a:prstDash val="solid"/>
                     </a:lnR>
                     <a:lnT w="9525" cap="flat" cmpd="sng" algn="ctr">
                       <a:solidFill>
-                        <a:srgbClr val="396F54"/>
+                        <a:srgbClr val="26C5BD"/>
                       </a:solidFill>
                       <a:prstDash val="solid"/>
                     </a:lnT>
                     <a:lnB w="9525" cap="flat" cmpd="sng" algn="ctr">
                       <a:solidFill>
-                        <a:srgbClr val="396F54"/>
+                        <a:srgbClr val="26C5BD"/>
                       </a:solidFill>
                       <a:prstDash val="solid"/>
                     </a:lnB>
                     <a:solidFill>
-                      <a:srgbClr val="396F54"/>
+                      <a:srgbClr val="26C5BD"/>
                     </a:solidFill>
                   </a:tcPr>
                 </a:tc>
@@ -5387,30 +5387,30 @@
                   <a:tcPr anchor="ctr" marL="73152" marR="73152">
                     <a:lnL w="9525" cap="flat" cmpd="sng" algn="ctr">
                       <a:solidFill>
-                        <a:srgbClr val="396F54"/>
+                        <a:srgbClr val="26C5BD"/>
                       </a:solidFill>
                       <a:prstDash val="solid"/>
                     </a:lnL>
                     <a:lnR w="9525" cap="flat" cmpd="sng" algn="ctr">
                       <a:solidFill>
-                        <a:srgbClr val="396F54"/>
+                        <a:srgbClr val="26C5BD"/>
                       </a:solidFill>
                       <a:prstDash val="solid"/>
                     </a:lnR>
                     <a:lnT w="9525" cap="flat" cmpd="sng" algn="ctr">
                       <a:solidFill>
-                        <a:srgbClr val="396F54"/>
+                        <a:srgbClr val="26C5BD"/>
                       </a:solidFill>
                       <a:prstDash val="solid"/>
                     </a:lnT>
                     <a:lnB w="9525" cap="flat" cmpd="sng" algn="ctr">
                       <a:solidFill>
-                        <a:srgbClr val="396F54"/>
+                        <a:srgbClr val="26C5BD"/>
                       </a:solidFill>
                       <a:prstDash val="solid"/>
                     </a:lnB>
                     <a:solidFill>
-                      <a:srgbClr val="396F54"/>
+                      <a:srgbClr val="26C5BD"/>
                     </a:solidFill>
                   </a:tcPr>
                 </a:tc>
@@ -5433,30 +5433,30 @@
                   <a:tcPr anchor="ctr" marL="73152" marR="73152">
                     <a:lnL w="9525" cap="flat" cmpd="sng" algn="ctr">
                       <a:solidFill>
-                        <a:srgbClr val="396F54"/>
+                        <a:srgbClr val="26C5BD"/>
                       </a:solidFill>
                       <a:prstDash val="solid"/>
                     </a:lnL>
                     <a:lnR w="9525" cap="flat" cmpd="sng" algn="ctr">
                       <a:solidFill>
-                        <a:srgbClr val="396F54"/>
+                        <a:srgbClr val="26C5BD"/>
                       </a:solidFill>
                       <a:prstDash val="solid"/>
                     </a:lnR>
                     <a:lnT w="9525" cap="flat" cmpd="sng" algn="ctr">
                       <a:solidFill>
-                        <a:srgbClr val="396F54"/>
+                        <a:srgbClr val="26C5BD"/>
                       </a:solidFill>
                       <a:prstDash val="solid"/>
                     </a:lnT>
                     <a:lnB w="9525" cap="flat" cmpd="sng" algn="ctr">
                       <a:solidFill>
-                        <a:srgbClr val="396F54"/>
+                        <a:srgbClr val="26C5BD"/>
                       </a:solidFill>
                       <a:prstDash val="solid"/>
                     </a:lnB>
                     <a:solidFill>
-                      <a:srgbClr val="396F54"/>
+                      <a:srgbClr val="26C5BD"/>
                     </a:solidFill>
                   </a:tcPr>
                 </a:tc>
@@ -5471,7 +5471,7 @@
                       <a:r>
                         <a:rPr sz="1600" b="1">
                           <a:solidFill>
-                            <a:srgbClr val="1C3629"/>
+                            <a:srgbClr val="115F5B"/>
                           </a:solidFill>
                         </a:rPr>
                         <a:t>키(cm)</a:t>
@@ -5481,30 +5481,30 @@
                   <a:tcPr anchor="ctr" marL="73152" marR="73152">
                     <a:lnL w="9525" cap="flat" cmpd="sng" algn="ctr">
                       <a:solidFill>
-                        <a:srgbClr val="D5ECE0"/>
+                        <a:srgbClr val="D1FAF8"/>
                       </a:solidFill>
                       <a:prstDash val="solid"/>
                     </a:lnL>
                     <a:lnR w="9525" cap="flat" cmpd="sng" algn="ctr">
                       <a:solidFill>
-                        <a:srgbClr val="D5ECE0"/>
+                        <a:srgbClr val="D1FAF8"/>
                       </a:solidFill>
                       <a:prstDash val="solid"/>
                     </a:lnR>
                     <a:lnT w="9525" cap="flat" cmpd="sng" algn="ctr">
                       <a:solidFill>
-                        <a:srgbClr val="D5ECE0"/>
+                        <a:srgbClr val="D1FAF8"/>
                       </a:solidFill>
                       <a:prstDash val="solid"/>
                     </a:lnT>
                     <a:lnB w="9525" cap="flat" cmpd="sng" algn="ctr">
                       <a:solidFill>
-                        <a:srgbClr val="D5ECE0"/>
+                        <a:srgbClr val="D1FAF8"/>
                       </a:solidFill>
                       <a:prstDash val="solid"/>
                     </a:lnB>
                     <a:solidFill>
-                      <a:srgbClr val="D5ECE0"/>
+                      <a:srgbClr val="D1FAF8"/>
                     </a:solidFill>
                   </a:tcPr>
                 </a:tc>
@@ -5527,25 +5527,25 @@
                   <a:tcPr anchor="ctr" marL="73152" marR="73152">
                     <a:lnL w="9525" cap="flat" cmpd="sng" algn="ctr">
                       <a:solidFill>
-                        <a:srgbClr val="D5ECE0"/>
+                        <a:srgbClr val="D1FAF8"/>
                       </a:solidFill>
                       <a:prstDash val="solid"/>
                     </a:lnL>
                     <a:lnR w="9525" cap="flat" cmpd="sng" algn="ctr">
                       <a:solidFill>
-                        <a:srgbClr val="D5ECE0"/>
+                        <a:srgbClr val="D1FAF8"/>
                       </a:solidFill>
                       <a:prstDash val="solid"/>
                     </a:lnR>
                     <a:lnT w="9525" cap="flat" cmpd="sng" algn="ctr">
                       <a:solidFill>
-                        <a:srgbClr val="D5ECE0"/>
+                        <a:srgbClr val="D1FAF8"/>
                       </a:solidFill>
                       <a:prstDash val="solid"/>
                     </a:lnT>
                     <a:lnB w="9525" cap="flat" cmpd="sng" algn="ctr">
                       <a:solidFill>
-                        <a:srgbClr val="D5ECE0"/>
+                        <a:srgbClr val="D1FAF8"/>
                       </a:solidFill>
                       <a:prstDash val="solid"/>
                     </a:lnB>
@@ -5573,25 +5573,25 @@
                   <a:tcPr anchor="ctr" marL="73152" marR="73152">
                     <a:lnL w="9525" cap="flat" cmpd="sng" algn="ctr">
                       <a:solidFill>
-                        <a:srgbClr val="D5ECE0"/>
+                        <a:srgbClr val="D1FAF8"/>
                       </a:solidFill>
                       <a:prstDash val="solid"/>
                     </a:lnL>
                     <a:lnR w="9525" cap="flat" cmpd="sng" algn="ctr">
                       <a:solidFill>
-                        <a:srgbClr val="D5ECE0"/>
+                        <a:srgbClr val="D1FAF8"/>
                       </a:solidFill>
                       <a:prstDash val="solid"/>
                     </a:lnR>
                     <a:lnT w="9525" cap="flat" cmpd="sng" algn="ctr">
                       <a:solidFill>
-                        <a:srgbClr val="D5ECE0"/>
+                        <a:srgbClr val="D1FAF8"/>
                       </a:solidFill>
                       <a:prstDash val="solid"/>
                     </a:lnT>
                     <a:lnB w="9525" cap="flat" cmpd="sng" algn="ctr">
                       <a:solidFill>
-                        <a:srgbClr val="D5ECE0"/>
+                        <a:srgbClr val="D1FAF8"/>
                       </a:solidFill>
                       <a:prstDash val="solid"/>
                     </a:lnB>
@@ -5619,25 +5619,25 @@
                   <a:tcPr anchor="ctr" marL="73152" marR="73152">
                     <a:lnL w="9525" cap="flat" cmpd="sng" algn="ctr">
                       <a:solidFill>
-                        <a:srgbClr val="D5ECE0"/>
+                        <a:srgbClr val="D1FAF8"/>
                       </a:solidFill>
                       <a:prstDash val="solid"/>
                     </a:lnL>
                     <a:lnR w="9525" cap="flat" cmpd="sng" algn="ctr">
                       <a:solidFill>
-                        <a:srgbClr val="D5ECE0"/>
+                        <a:srgbClr val="D1FAF8"/>
                       </a:solidFill>
                       <a:prstDash val="solid"/>
                     </a:lnR>
                     <a:lnT w="9525" cap="flat" cmpd="sng" algn="ctr">
                       <a:solidFill>
-                        <a:srgbClr val="D5ECE0"/>
+                        <a:srgbClr val="D1FAF8"/>
                       </a:solidFill>
                       <a:prstDash val="solid"/>
                     </a:lnT>
                     <a:lnB w="9525" cap="flat" cmpd="sng" algn="ctr">
                       <a:solidFill>
-                        <a:srgbClr val="D5ECE0"/>
+                        <a:srgbClr val="D1FAF8"/>
                       </a:solidFill>
                       <a:prstDash val="solid"/>
                     </a:lnB>
@@ -5665,25 +5665,25 @@
                   <a:tcPr anchor="ctr" marL="73152" marR="73152">
                     <a:lnL w="9525" cap="flat" cmpd="sng" algn="ctr">
                       <a:solidFill>
-                        <a:srgbClr val="D5ECE0"/>
+                        <a:srgbClr val="D1FAF8"/>
                       </a:solidFill>
                       <a:prstDash val="solid"/>
                     </a:lnL>
                     <a:lnR w="9525" cap="flat" cmpd="sng" algn="ctr">
                       <a:solidFill>
-                        <a:srgbClr val="D5ECE0"/>
+                        <a:srgbClr val="D1FAF8"/>
                       </a:solidFill>
                       <a:prstDash val="solid"/>
                     </a:lnR>
                     <a:lnT w="9525" cap="flat" cmpd="sng" algn="ctr">
                       <a:solidFill>
-                        <a:srgbClr val="D5ECE0"/>
+                        <a:srgbClr val="D1FAF8"/>
                       </a:solidFill>
                       <a:prstDash val="solid"/>
                     </a:lnT>
                     <a:lnB w="9525" cap="flat" cmpd="sng" algn="ctr">
                       <a:solidFill>
-                        <a:srgbClr val="D5ECE0"/>
+                        <a:srgbClr val="D1FAF8"/>
                       </a:solidFill>
                       <a:prstDash val="solid"/>
                     </a:lnB>
@@ -5703,7 +5703,7 @@
                       <a:r>
                         <a:rPr sz="1600" b="1">
                           <a:solidFill>
-                            <a:srgbClr val="1C3629"/>
+                            <a:srgbClr val="115F5B"/>
                           </a:solidFill>
                         </a:rPr>
                         <a:t>몸무게(kg)</a:t>
@@ -5713,30 +5713,30 @@
                   <a:tcPr anchor="ctr" marL="73152" marR="73152">
                     <a:lnL w="9525" cap="flat" cmpd="sng" algn="ctr">
                       <a:solidFill>
-                        <a:srgbClr val="D5ECE0"/>
+                        <a:srgbClr val="D1FAF8"/>
                       </a:solidFill>
                       <a:prstDash val="solid"/>
                     </a:lnL>
                     <a:lnR w="9525" cap="flat" cmpd="sng" algn="ctr">
                       <a:solidFill>
-                        <a:srgbClr val="D5ECE0"/>
+                        <a:srgbClr val="D1FAF8"/>
                       </a:solidFill>
                       <a:prstDash val="solid"/>
                     </a:lnR>
                     <a:lnT w="9525" cap="flat" cmpd="sng" algn="ctr">
                       <a:solidFill>
-                        <a:srgbClr val="D5ECE0"/>
+                        <a:srgbClr val="D1FAF8"/>
                       </a:solidFill>
                       <a:prstDash val="solid"/>
                     </a:lnT>
                     <a:lnB w="9525" cap="flat" cmpd="sng" algn="ctr">
                       <a:solidFill>
-                        <a:srgbClr val="D5ECE0"/>
+                        <a:srgbClr val="D1FAF8"/>
                       </a:solidFill>
                       <a:prstDash val="solid"/>
                     </a:lnB>
                     <a:solidFill>
-                      <a:srgbClr val="D5ECE0"/>
+                      <a:srgbClr val="D1FAF8"/>
                     </a:solidFill>
                   </a:tcPr>
                 </a:tc>
@@ -5759,30 +5759,30 @@
                   <a:tcPr anchor="ctr" marL="73152" marR="73152">
                     <a:lnL w="9525" cap="flat" cmpd="sng" algn="ctr">
                       <a:solidFill>
-                        <a:srgbClr val="D5ECE0"/>
+                        <a:srgbClr val="D1FAF8"/>
                       </a:solidFill>
                       <a:prstDash val="solid"/>
                     </a:lnL>
                     <a:lnR w="9525" cap="flat" cmpd="sng" algn="ctr">
                       <a:solidFill>
-                        <a:srgbClr val="D5ECE0"/>
+                        <a:srgbClr val="D1FAF8"/>
                       </a:solidFill>
                       <a:prstDash val="solid"/>
                     </a:lnR>
                     <a:lnT w="9525" cap="flat" cmpd="sng" algn="ctr">
                       <a:solidFill>
-                        <a:srgbClr val="D5ECE0"/>
+                        <a:srgbClr val="D1FAF8"/>
                       </a:solidFill>
                       <a:prstDash val="solid"/>
                     </a:lnT>
                     <a:lnB w="9525" cap="flat" cmpd="sng" algn="ctr">
                       <a:solidFill>
-                        <a:srgbClr val="D5ECE0"/>
+                        <a:srgbClr val="D1FAF8"/>
                       </a:solidFill>
                       <a:prstDash val="solid"/>
                     </a:lnB>
                     <a:solidFill>
-                      <a:srgbClr val="F2F8F5"/>
+                      <a:srgbClr val="EEFCFB"/>
                     </a:solidFill>
                   </a:tcPr>
                 </a:tc>
@@ -5805,30 +5805,30 @@
                   <a:tcPr anchor="ctr" marL="73152" marR="73152">
                     <a:lnL w="9525" cap="flat" cmpd="sng" algn="ctr">
                       <a:solidFill>
-                        <a:srgbClr val="D5ECE0"/>
+                        <a:srgbClr val="D1FAF8"/>
                       </a:solidFill>
                       <a:prstDash val="solid"/>
                     </a:lnL>
                     <a:lnR w="9525" cap="flat" cmpd="sng" algn="ctr">
                       <a:solidFill>
-                        <a:srgbClr val="D5ECE0"/>
+                        <a:srgbClr val="D1FAF8"/>
                       </a:solidFill>
                       <a:prstDash val="solid"/>
                     </a:lnR>
                     <a:lnT w="9525" cap="flat" cmpd="sng" algn="ctr">
                       <a:solidFill>
-                        <a:srgbClr val="D5ECE0"/>
+                        <a:srgbClr val="D1FAF8"/>
                       </a:solidFill>
                       <a:prstDash val="solid"/>
                     </a:lnT>
                     <a:lnB w="9525" cap="flat" cmpd="sng" algn="ctr">
                       <a:solidFill>
-                        <a:srgbClr val="D5ECE0"/>
+                        <a:srgbClr val="D1FAF8"/>
                       </a:solidFill>
                       <a:prstDash val="solid"/>
                     </a:lnB>
                     <a:solidFill>
-                      <a:srgbClr val="F2F8F5"/>
+                      <a:srgbClr val="EEFCFB"/>
                     </a:solidFill>
                   </a:tcPr>
                 </a:tc>
@@ -5851,30 +5851,30 @@
                   <a:tcPr anchor="ctr" marL="73152" marR="73152">
                     <a:lnL w="9525" cap="flat" cmpd="sng" algn="ctr">
                       <a:solidFill>
-                        <a:srgbClr val="D5ECE0"/>
+                        <a:srgbClr val="D1FAF8"/>
                       </a:solidFill>
                       <a:prstDash val="solid"/>
                     </a:lnL>
                     <a:lnR w="9525" cap="flat" cmpd="sng" algn="ctr">
                       <a:solidFill>
-                        <a:srgbClr val="D5ECE0"/>
+                        <a:srgbClr val="D1FAF8"/>
                       </a:solidFill>
                       <a:prstDash val="solid"/>
                     </a:lnR>
                     <a:lnT w="9525" cap="flat" cmpd="sng" algn="ctr">
                       <a:solidFill>
-                        <a:srgbClr val="D5ECE0"/>
+                        <a:srgbClr val="D1FAF8"/>
                       </a:solidFill>
                       <a:prstDash val="solid"/>
                     </a:lnT>
                     <a:lnB w="9525" cap="flat" cmpd="sng" algn="ctr">
                       <a:solidFill>
-                        <a:srgbClr val="D5ECE0"/>
+                        <a:srgbClr val="D1FAF8"/>
                       </a:solidFill>
                       <a:prstDash val="solid"/>
                     </a:lnB>
                     <a:solidFill>
-                      <a:srgbClr val="F2F8F5"/>
+                      <a:srgbClr val="EEFCFB"/>
                     </a:solidFill>
                   </a:tcPr>
                 </a:tc>
@@ -5897,30 +5897,30 @@
                   <a:tcPr anchor="ctr" marL="73152" marR="73152">
                     <a:lnL w="9525" cap="flat" cmpd="sng" algn="ctr">
                       <a:solidFill>
-                        <a:srgbClr val="D5ECE0"/>
+                        <a:srgbClr val="D1FAF8"/>
                       </a:solidFill>
                       <a:prstDash val="solid"/>
                     </a:lnL>
                     <a:lnR w="9525" cap="flat" cmpd="sng" algn="ctr">
                       <a:solidFill>
-                        <a:srgbClr val="D5ECE0"/>
+                        <a:srgbClr val="D1FAF8"/>
                       </a:solidFill>
                       <a:prstDash val="solid"/>
                     </a:lnR>
                     <a:lnT w="9525" cap="flat" cmpd="sng" algn="ctr">
                       <a:solidFill>
-                        <a:srgbClr val="D5ECE0"/>
+                        <a:srgbClr val="D1FAF8"/>
                       </a:solidFill>
                       <a:prstDash val="solid"/>
                     </a:lnT>
                     <a:lnB w="9525" cap="flat" cmpd="sng" algn="ctr">
                       <a:solidFill>
-                        <a:srgbClr val="D5ECE0"/>
+                        <a:srgbClr val="D1FAF8"/>
                       </a:solidFill>
                       <a:prstDash val="solid"/>
                     </a:lnB>
                     <a:solidFill>
-                      <a:srgbClr val="F2F8F5"/>
+                      <a:srgbClr val="EEFCFB"/>
                     </a:solidFill>
                   </a:tcPr>
                 </a:tc>
@@ -5935,7 +5935,7 @@
                       <a:r>
                         <a:rPr sz="1600" b="1">
                           <a:solidFill>
-                            <a:srgbClr val="1C3629"/>
+                            <a:srgbClr val="115F5B"/>
                           </a:solidFill>
                         </a:rPr>
                         <a:t>새로 한 것</a:t>
@@ -5945,30 +5945,30 @@
                   <a:tcPr anchor="ctr" marL="73152" marR="73152">
                     <a:lnL w="9525" cap="flat" cmpd="sng" algn="ctr">
                       <a:solidFill>
-                        <a:srgbClr val="D5ECE0"/>
+                        <a:srgbClr val="D1FAF8"/>
                       </a:solidFill>
                       <a:prstDash val="solid"/>
                     </a:lnL>
                     <a:lnR w="9525" cap="flat" cmpd="sng" algn="ctr">
                       <a:solidFill>
-                        <a:srgbClr val="D5ECE0"/>
+                        <a:srgbClr val="D1FAF8"/>
                       </a:solidFill>
                       <a:prstDash val="solid"/>
                     </a:lnR>
                     <a:lnT w="9525" cap="flat" cmpd="sng" algn="ctr">
                       <a:solidFill>
-                        <a:srgbClr val="D5ECE0"/>
+                        <a:srgbClr val="D1FAF8"/>
                       </a:solidFill>
                       <a:prstDash val="solid"/>
                     </a:lnT>
                     <a:lnB w="9525" cap="flat" cmpd="sng" algn="ctr">
                       <a:solidFill>
-                        <a:srgbClr val="D5ECE0"/>
+                        <a:srgbClr val="D1FAF8"/>
                       </a:solidFill>
                       <a:prstDash val="solid"/>
                     </a:lnB>
                     <a:solidFill>
-                      <a:srgbClr val="D5ECE0"/>
+                      <a:srgbClr val="D1FAF8"/>
                     </a:solidFill>
                   </a:tcPr>
                 </a:tc>
@@ -5991,25 +5991,25 @@
                   <a:tcPr anchor="ctr" marL="73152" marR="73152">
                     <a:lnL w="9525" cap="flat" cmpd="sng" algn="ctr">
                       <a:solidFill>
-                        <a:srgbClr val="D5ECE0"/>
+                        <a:srgbClr val="D1FAF8"/>
                       </a:solidFill>
                       <a:prstDash val="solid"/>
                     </a:lnL>
                     <a:lnR w="9525" cap="flat" cmpd="sng" algn="ctr">
                       <a:solidFill>
-                        <a:srgbClr val="D5ECE0"/>
+                        <a:srgbClr val="D1FAF8"/>
                       </a:solidFill>
                       <a:prstDash val="solid"/>
                     </a:lnR>
                     <a:lnT w="9525" cap="flat" cmpd="sng" algn="ctr">
                       <a:solidFill>
-                        <a:srgbClr val="D5ECE0"/>
+                        <a:srgbClr val="D1FAF8"/>
                       </a:solidFill>
                       <a:prstDash val="solid"/>
                     </a:lnT>
                     <a:lnB w="9525" cap="flat" cmpd="sng" algn="ctr">
                       <a:solidFill>
-                        <a:srgbClr val="D5ECE0"/>
+                        <a:srgbClr val="D1FAF8"/>
                       </a:solidFill>
                       <a:prstDash val="solid"/>
                     </a:lnB>
@@ -6037,25 +6037,25 @@
                   <a:tcPr anchor="ctr" marL="73152" marR="73152">
                     <a:lnL w="9525" cap="flat" cmpd="sng" algn="ctr">
                       <a:solidFill>
-                        <a:srgbClr val="D5ECE0"/>
+                        <a:srgbClr val="D1FAF8"/>
                       </a:solidFill>
                       <a:prstDash val="solid"/>
                     </a:lnL>
                     <a:lnR w="9525" cap="flat" cmpd="sng" algn="ctr">
                       <a:solidFill>
-                        <a:srgbClr val="D5ECE0"/>
+                        <a:srgbClr val="D1FAF8"/>
                       </a:solidFill>
                       <a:prstDash val="solid"/>
                     </a:lnR>
                     <a:lnT w="9525" cap="flat" cmpd="sng" algn="ctr">
                       <a:solidFill>
-                        <a:srgbClr val="D5ECE0"/>
+                        <a:srgbClr val="D1FAF8"/>
                       </a:solidFill>
                       <a:prstDash val="solid"/>
                     </a:lnT>
                     <a:lnB w="9525" cap="flat" cmpd="sng" algn="ctr">
                       <a:solidFill>
-                        <a:srgbClr val="D5ECE0"/>
+                        <a:srgbClr val="D1FAF8"/>
                       </a:solidFill>
                       <a:prstDash val="solid"/>
                     </a:lnB>
@@ -6083,25 +6083,25 @@
                   <a:tcPr anchor="ctr" marL="73152" marR="73152">
                     <a:lnL w="9525" cap="flat" cmpd="sng" algn="ctr">
                       <a:solidFill>
-                        <a:srgbClr val="D5ECE0"/>
+                        <a:srgbClr val="D1FAF8"/>
                       </a:solidFill>
                       <a:prstDash val="solid"/>
                     </a:lnL>
                     <a:lnR w="9525" cap="flat" cmpd="sng" algn="ctr">
                       <a:solidFill>
-                        <a:srgbClr val="D5ECE0"/>
+                        <a:srgbClr val="D1FAF8"/>
                       </a:solidFill>
                       <a:prstDash val="solid"/>
                     </a:lnR>
                     <a:lnT w="9525" cap="flat" cmpd="sng" algn="ctr">
                       <a:solidFill>
-                        <a:srgbClr val="D5ECE0"/>
+                        <a:srgbClr val="D1FAF8"/>
                       </a:solidFill>
                       <a:prstDash val="solid"/>
                     </a:lnT>
                     <a:lnB w="9525" cap="flat" cmpd="sng" algn="ctr">
                       <a:solidFill>
-                        <a:srgbClr val="D5ECE0"/>
+                        <a:srgbClr val="D1FAF8"/>
                       </a:solidFill>
                       <a:prstDash val="solid"/>
                     </a:lnB>
@@ -6129,25 +6129,25 @@
                   <a:tcPr anchor="ctr" marL="73152" marR="73152">
                     <a:lnL w="9525" cap="flat" cmpd="sng" algn="ctr">
                       <a:solidFill>
-                        <a:srgbClr val="D5ECE0"/>
+                        <a:srgbClr val="D1FAF8"/>
                       </a:solidFill>
                       <a:prstDash val="solid"/>
                     </a:lnL>
                     <a:lnR w="9525" cap="flat" cmpd="sng" algn="ctr">
                       <a:solidFill>
-                        <a:srgbClr val="D5ECE0"/>
+                        <a:srgbClr val="D1FAF8"/>
                       </a:solidFill>
                       <a:prstDash val="solid"/>
                     </a:lnR>
                     <a:lnT w="9525" cap="flat" cmpd="sng" algn="ctr">
                       <a:solidFill>
-                        <a:srgbClr val="D5ECE0"/>
+                        <a:srgbClr val="D1FAF8"/>
                       </a:solidFill>
                       <a:prstDash val="solid"/>
                     </a:lnT>
                     <a:lnB w="9525" cap="flat" cmpd="sng" algn="ctr">
                       <a:solidFill>
-                        <a:srgbClr val="D5ECE0"/>
+                        <a:srgbClr val="D1FAF8"/>
                       </a:solidFill>
                       <a:prstDash val="solid"/>
                     </a:lnB>
@@ -6202,7 +6202,7 @@
             <a:avLst/>
           </a:prstGeom>
           <a:solidFill>
-            <a:srgbClr val="D5ECE0"/>
+            <a:srgbClr val="D1FAF8"/>
           </a:solidFill>
           <a:ln>
             <a:noFill/>
@@ -6231,7 +6231,7 @@
             <a:avLst/>
           </a:prstGeom>
           <a:solidFill>
-            <a:srgbClr val="396F54"/>
+            <a:srgbClr val="26C5BD"/>
           </a:solidFill>
           <a:ln>
             <a:noFill/>
@@ -6275,7 +6275,7 @@
             <a:r>
               <a:rPr sz="3000" b="1" i="0">
                 <a:solidFill>
-                  <a:srgbClr val="1C3629"/>
+                  <a:srgbClr val="115F5B"/>
                 </a:solidFill>
               </a:rPr>
               <a:t>사진 모음</a:t>
@@ -6300,11 +6300,11 @@
             </a:avLst>
           </a:prstGeom>
           <a:solidFill>
-            <a:srgbClr val="D5ECE0"/>
+            <a:srgbClr val="D1FAF8"/>
           </a:solidFill>
           <a:ln w="19050">
             <a:solidFill>
-              <a:srgbClr val="396F54"/>
+              <a:srgbClr val="26C5BD"/>
             </a:solidFill>
             <a:prstDash val="dash"/>
           </a:ln>
@@ -6323,7 +6323,7 @@
             <a:r>
               <a:rPr sz="1200" b="0" i="0">
                 <a:solidFill>
-                  <a:srgbClr val="1C3629"/>
+                  <a:srgbClr val="115F5B"/>
                 </a:solidFill>
               </a:rPr>
               <a:t>사진 1</a:t>
@@ -6348,11 +6348,11 @@
             </a:avLst>
           </a:prstGeom>
           <a:solidFill>
-            <a:srgbClr val="D5ECE0"/>
+            <a:srgbClr val="D1FAF8"/>
           </a:solidFill>
           <a:ln w="19050">
             <a:solidFill>
-              <a:srgbClr val="396F54"/>
+              <a:srgbClr val="26C5BD"/>
             </a:solidFill>
             <a:prstDash val="dash"/>
           </a:ln>
@@ -6371,7 +6371,7 @@
             <a:r>
               <a:rPr sz="1200" b="0" i="0">
                 <a:solidFill>
-                  <a:srgbClr val="1C3629"/>
+                  <a:srgbClr val="115F5B"/>
                 </a:solidFill>
               </a:rPr>
               <a:t>사진 2</a:t>
@@ -6396,11 +6396,11 @@
             </a:avLst>
           </a:prstGeom>
           <a:solidFill>
-            <a:srgbClr val="D5ECE0"/>
+            <a:srgbClr val="D1FAF8"/>
           </a:solidFill>
           <a:ln w="19050">
             <a:solidFill>
-              <a:srgbClr val="396F54"/>
+              <a:srgbClr val="26C5BD"/>
             </a:solidFill>
             <a:prstDash val="dash"/>
           </a:ln>
@@ -6419,7 +6419,7 @@
             <a:r>
               <a:rPr sz="1200" b="0" i="0">
                 <a:solidFill>
-                  <a:srgbClr val="1C3629"/>
+                  <a:srgbClr val="115F5B"/>
                 </a:solidFill>
               </a:rPr>
               <a:t>사진 3</a:t>
@@ -6444,11 +6444,11 @@
             </a:avLst>
           </a:prstGeom>
           <a:solidFill>
-            <a:srgbClr val="D5ECE0"/>
+            <a:srgbClr val="D1FAF8"/>
           </a:solidFill>
           <a:ln w="19050">
             <a:solidFill>
-              <a:srgbClr val="396F54"/>
+              <a:srgbClr val="26C5BD"/>
             </a:solidFill>
             <a:prstDash val="dash"/>
           </a:ln>
@@ -6467,7 +6467,7 @@
             <a:r>
               <a:rPr sz="1200" b="0" i="0">
                 <a:solidFill>
-                  <a:srgbClr val="1C3629"/>
+                  <a:srgbClr val="115F5B"/>
                 </a:solidFill>
               </a:rPr>
               <a:t>사진 4</a:t>
@@ -6492,11 +6492,11 @@
             </a:avLst>
           </a:prstGeom>
           <a:solidFill>
-            <a:srgbClr val="D5ECE0"/>
+            <a:srgbClr val="D1FAF8"/>
           </a:solidFill>
           <a:ln w="19050">
             <a:solidFill>
-              <a:srgbClr val="396F54"/>
+              <a:srgbClr val="26C5BD"/>
             </a:solidFill>
             <a:prstDash val="dash"/>
           </a:ln>
@@ -6515,7 +6515,7 @@
             <a:r>
               <a:rPr sz="1200" b="0" i="0">
                 <a:solidFill>
-                  <a:srgbClr val="1C3629"/>
+                  <a:srgbClr val="115F5B"/>
                 </a:solidFill>
               </a:rPr>
               <a:t>사진 5</a:t>
@@ -6540,11 +6540,11 @@
             </a:avLst>
           </a:prstGeom>
           <a:solidFill>
-            <a:srgbClr val="D5ECE0"/>
+            <a:srgbClr val="D1FAF8"/>
           </a:solidFill>
           <a:ln w="19050">
             <a:solidFill>
-              <a:srgbClr val="396F54"/>
+              <a:srgbClr val="26C5BD"/>
             </a:solidFill>
             <a:prstDash val="dash"/>
           </a:ln>
@@ -6563,7 +6563,7 @@
             <a:r>
               <a:rPr sz="1200" b="0" i="0">
                 <a:solidFill>
-                  <a:srgbClr val="1C3629"/>
+                  <a:srgbClr val="115F5B"/>
                 </a:solidFill>
               </a:rPr>
               <a:t>사진 6</a:t>
@@ -6588,11 +6588,11 @@
             </a:avLst>
           </a:prstGeom>
           <a:solidFill>
-            <a:srgbClr val="D5ECE0"/>
+            <a:srgbClr val="D1FAF8"/>
           </a:solidFill>
           <a:ln w="19050">
             <a:solidFill>
-              <a:srgbClr val="396F54"/>
+              <a:srgbClr val="26C5BD"/>
             </a:solidFill>
             <a:prstDash val="dash"/>
           </a:ln>
@@ -6611,7 +6611,7 @@
             <a:r>
               <a:rPr sz="1200" b="0" i="0">
                 <a:solidFill>
-                  <a:srgbClr val="1C3629"/>
+                  <a:srgbClr val="115F5B"/>
                 </a:solidFill>
               </a:rPr>
               <a:t>사진 7</a:t>
@@ -6636,11 +6636,11 @@
             </a:avLst>
           </a:prstGeom>
           <a:solidFill>
-            <a:srgbClr val="D5ECE0"/>
+            <a:srgbClr val="D1FAF8"/>
           </a:solidFill>
           <a:ln w="19050">
             <a:solidFill>
-              <a:srgbClr val="396F54"/>
+              <a:srgbClr val="26C5BD"/>
             </a:solidFill>
             <a:prstDash val="dash"/>
           </a:ln>
@@ -6659,7 +6659,7 @@
             <a:r>
               <a:rPr sz="1200" b="0" i="0">
                 <a:solidFill>
-                  <a:srgbClr val="1C3629"/>
+                  <a:srgbClr val="115F5B"/>
                 </a:solidFill>
               </a:rPr>
               <a:t>사진 8</a:t>
@@ -6739,7 +6739,7 @@
             <a:r>
               <a:rPr sz="3400" b="1" i="0">
                 <a:solidFill>
-                  <a:srgbClr val="1C3629"/>
+                  <a:srgbClr val="115F5B"/>
                 </a:solidFill>
               </a:rPr>
               <a:t>와 주셔서 고맙습니다</a:t>
@@ -6777,7 +6777,7 @@
             <a:r>
               <a:rPr sz="1700" b="0" i="1">
                 <a:solidFill>
-                  <a:srgbClr val="1C3629"/>
+                  <a:srgbClr val="115F5B"/>
                 </a:solidFill>
               </a:rPr>
               <a:t>아이가 한 살이 되었습니다</a:t>
@@ -6842,34 +6842,34 @@
         <a:sysClr val="window" lastClr="FFFFFF"/>
       </a:lt1>
       <a:dk2>
-        <a:srgbClr val="1C3629"/>
+        <a:srgbClr val="115F5B"/>
       </a:dk2>
       <a:lt2>
-        <a:srgbClr val="F2F8F5"/>
+        <a:srgbClr val="EEFCFB"/>
       </a:lt2>
       <a:accent1>
-        <a:srgbClr val="396F54"/>
+        <a:srgbClr val="26C5BD"/>
       </a:accent1>
       <a:accent2>
-        <a:srgbClr val="874587"/>
+        <a:srgbClr val="209DB6"/>
       </a:accent2>
       <a:accent3>
-        <a:srgbClr val="1C3629"/>
+        <a:srgbClr val="115F5B"/>
       </a:accent3>
       <a:accent4>
-        <a:srgbClr val="D5ECE0"/>
+        <a:srgbClr val="D1FAF8"/>
       </a:accent4>
       <a:accent5>
-        <a:srgbClr val="605A6E"/>
+        <a:srgbClr val="23B1BA"/>
       </a:accent5>
       <a:accent6>
-        <a:srgbClr val="77867F"/>
+        <a:srgbClr val="709F9D"/>
       </a:accent6>
       <a:hlink>
-        <a:srgbClr val="396F54"/>
+        <a:srgbClr val="26C5BD"/>
       </a:hlink>
       <a:folHlink>
-        <a:srgbClr val="1C3629"/>
+        <a:srgbClr val="115F5B"/>
       </a:folHlink>
     </a:clrScheme>
     <a:fontScheme name="Office">

--- a/public/fun/pack/pptx/birthday/돌잔치_21_성장기록중심_대나무숲.pptx
+++ b/public/fun/pack/pptx/birthday/돌잔치_21_성장기록중심_대나무숲.pptx
@@ -3286,6 +3286,14 @@
 <file path=ppt/slides/slide1.xml><?xml version="1.0" encoding="utf-8"?>
 <p:sld xmlns:a="http://schemas.openxmlformats.org/drawingml/2006/main" xmlns:p="http://schemas.openxmlformats.org/presentationml/2006/main" xmlns:r="http://schemas.openxmlformats.org/officeDocument/2006/relationships">
   <p:cSld>
+    <p:bg>
+      <p:bgPr>
+        <a:solidFill>
+          <a:srgbClr val="EAFDF4"/>
+        </a:solidFill>
+        <a:effectLst/>
+      </p:bgPr>
+    </p:bg>
     <p:spTree>
       <p:nvGrpSpPr>
         <p:cNvPr id="1" name=""/>
@@ -3293,30 +3301,119 @@
         <p:nvPr/>
       </p:nvGrpSpPr>
       <p:grpSpPr/>
-      <p:pic>
-        <p:nvPicPr>
-          <p:cNvPr id="3" name="표지 그림" descr="birthday-21.jpg"/>
-          <p:cNvPicPr>
-            <a:picLocks noChangeAspect="1"/>
-          </p:cNvPicPr>
+      <p:sp>
+        <p:nvSpPr>
+          <p:cNvPr id="3" name="사진 자리"/>
+          <p:cNvSpPr/>
           <p:nvPr/>
-        </p:nvPicPr>
-        <p:blipFill>
-          <a:blip r:embed="rId2"/>
-          <a:stretch>
-            <a:fillRect/>
-          </a:stretch>
-        </p:blipFill>
-        <p:spPr>
-          <a:xfrm>
-            <a:off x="0" y="0"/>
-            <a:ext cx="12191695" cy="6858000"/>
+        </p:nvSpPr>
+        <p:spPr>
+          <a:xfrm>
+            <a:off x="7558851" y="685800"/>
+            <a:ext cx="3169840" cy="5486400"/>
+          </a:xfrm>
+          <a:prstGeom prst="round2SameRect">
+            <a:avLst>
+              <a:gd name="adj1" fmla="val 50000"/>
+              <a:gd name="adj2" fmla="val 0"/>
+            </a:avLst>
+          </a:prstGeom>
+          <a:solidFill>
+            <a:srgbClr val="A5F3CC"/>
+          </a:solidFill>
+          <a:ln>
+            <a:noFill/>
+          </a:ln>
+        </p:spPr>
+        <p:txBody>
+          <a:bodyPr rtlCol="0" anchor="ctr" wrap="square" lIns="54864" rIns="54864" tIns="27432" bIns="27432">
+            <a:noAutofit/>
+          </a:bodyPr>
+          <a:lstStyle/>
+          <a:p>
+            <a:pPr algn="ctr">
+              <a:lnSpc>
+                <a:spcPct val="100000"/>
+              </a:lnSpc>
+            </a:pPr>
+            <a:r>
+              <a:rPr sz="1400" b="0" i="0">
+                <a:solidFill>
+                  <a:srgbClr val="274938"/>
+                </a:solidFill>
+              </a:rPr>
+              <a:t>사진을 넣어 주세요</a:t>
+            </a:r>
+          </a:p>
+        </p:txBody>
+      </p:sp>
+      <p:sp>
+        <p:nvSpPr>
+          <p:cNvPr id="4" name="장식"/>
+          <p:cNvSpPr/>
+          <p:nvPr/>
+        </p:nvSpPr>
+        <p:spPr>
+          <a:xfrm>
+            <a:off x="6827349" y="4251960"/>
+            <a:ext cx="1005840" cy="1005840"/>
+          </a:xfrm>
+          <a:prstGeom prst="ellipse">
+            <a:avLst/>
+          </a:prstGeom>
+          <a:solidFill>
+            <a:srgbClr val="A5F3CC"/>
+          </a:solidFill>
+          <a:ln>
+            <a:noFill/>
+          </a:ln>
+        </p:spPr>
+        <p:txBody>
+          <a:bodyPr rtlCol="0" anchor="ctr"/>
+          <a:lstStyle/>
+          <a:p>
+            <a:pPr algn="ctr"/>
+          </a:p>
+        </p:txBody>
+      </p:sp>
+      <p:sp>
+        <p:nvSpPr>
+          <p:cNvPr id="5" name="라벨"/>
+          <p:cNvSpPr txBox="1"/>
+          <p:nvPr/>
+        </p:nvSpPr>
+        <p:spPr>
+          <a:xfrm>
+            <a:off x="822960" y="2148840"/>
+            <a:ext cx="5608179" cy="274320"/>
           </a:xfrm>
           <a:prstGeom prst="rect">
             <a:avLst/>
           </a:prstGeom>
-        </p:spPr>
-      </p:pic>
+          <a:noFill/>
+        </p:spPr>
+        <p:txBody>
+          <a:bodyPr wrap="square" lIns="54864" rIns="54864" tIns="27432" bIns="27432" anchor="t">
+            <a:noAutofit/>
+          </a:bodyPr>
+          <a:lstStyle/>
+          <a:p>
+            <a:pPr algn="l">
+              <a:lnSpc>
+                <a:spcPct val="115000"/>
+              </a:lnSpc>
+            </a:pPr>
+            <a:r>
+              <a:rPr sz="1000" b="1" i="0" spc="250">
+                <a:solidFill>
+                  <a:srgbClr val="26231F"/>
+                </a:solidFill>
+              </a:rPr>
+              <a:t>FIRST BIRTHDAY</a:t>
+            </a:r>
+          </a:p>
+        </p:txBody>
+      </p:sp>
       <p:sp>
         <p:nvSpPr>
           <p:cNvPr id="2" name="Title 1"/>
@@ -3329,8 +3426,8 @@
         </p:nvSpPr>
         <p:spPr>
           <a:xfrm>
-            <a:off x="853418" y="2057400"/>
-            <a:ext cx="6095847" cy="1554480"/>
+            <a:off x="822960" y="2606040"/>
+            <a:ext cx="5608179" cy="1188720"/>
           </a:xfrm>
         </p:spPr>
         <p:txBody>
@@ -3347,7 +3444,7 @@
             <a:r>
               <a:rPr sz="4000" b="1" i="0">
                 <a:solidFill>
-                  <a:srgbClr val="115F5B"/>
+                  <a:srgbClr val="26231F"/>
                 </a:solidFill>
               </a:rPr>
               <a:t>첫 번째 생일</a:t>
@@ -3357,14 +3454,14 @@
       </p:sp>
       <p:sp>
         <p:nvSpPr>
-          <p:cNvPr id="4" name="한 줄 문구"/>
+          <p:cNvPr id="6" name="한 줄 문구"/>
           <p:cNvSpPr txBox="1"/>
           <p:nvPr/>
         </p:nvSpPr>
         <p:spPr>
           <a:xfrm>
-            <a:off x="853418" y="3749039"/>
-            <a:ext cx="6095847" cy="822960"/>
+            <a:off x="822960" y="3886200"/>
+            <a:ext cx="5608179" cy="822960"/>
           </a:xfrm>
           <a:prstGeom prst="rect">
             <a:avLst/>
@@ -3383,26 +3480,26 @@
               </a:lnSpc>
             </a:pPr>
             <a:r>
-              <a:rPr sz="1700" b="0" i="1">
+              <a:rPr sz="1700" b="0" i="0">
                 <a:solidFill>
-                  <a:srgbClr val="115F5B"/>
+                  <a:srgbClr val="26231F"/>
                 </a:solidFill>
               </a:rPr>
-              <a:t>땀 흘리며 보낸 첫 여름을 지났습니다</a:t>
-            </a:r>
-          </a:p>
-        </p:txBody>
-      </p:sp>
-      <p:sp>
-        <p:nvSpPr>
-          <p:cNvPr id="5" name="안내 문구"/>
+              <a:t>땀 흘리며 보낸 날도 잘 지났습니다</a:t>
+            </a:r>
+          </a:p>
+        </p:txBody>
+      </p:sp>
+      <p:sp>
+        <p:nvSpPr>
+          <p:cNvPr id="7" name="안내 문구"/>
           <p:cNvSpPr txBox="1"/>
           <p:nvPr/>
         </p:nvSpPr>
         <p:spPr>
           <a:xfrm>
-            <a:off x="853418" y="4617720"/>
-            <a:ext cx="6095847" cy="914400"/>
+            <a:off x="822960" y="4754880"/>
+            <a:ext cx="5608179" cy="914400"/>
           </a:xfrm>
           <a:prstGeom prst="rect">
             <a:avLst/>
@@ -3423,10 +3520,10 @@
             <a:r>
               <a:rPr sz="1400" b="0" i="0">
                 <a:solidFill>
-                  <a:srgbClr val="666666"/>
+                  <a:srgbClr val="26231F"/>
                 </a:solidFill>
               </a:rPr>
-              <a:t>아기 이름 · 2027. 00. 00</a:t>
+              <a:t>아기 이름 · 날짜 입력</a:t>
             </a:r>
           </a:p>
           <a:p>
@@ -3438,7 +3535,7 @@
             <a:r>
               <a:rPr sz="1400" b="0" i="0">
                 <a:solidFill>
-                  <a:srgbClr val="666666"/>
+                  <a:srgbClr val="26231F"/>
                 </a:solidFill>
               </a:rPr>
               <a:t>장소를 입력하세요</a:t>
@@ -3460,7 +3557,7 @@
     <p:bg>
       <p:bgPr>
         <a:solidFill>
-          <a:srgbClr val="FFFFFF"/>
+          <a:srgbClr val="EAFDF4"/>
         </a:solidFill>
         <a:effectLst/>
       </p:bgPr>
@@ -3480,43 +3577,81 @@
         </p:nvSpPr>
         <p:spPr>
           <a:xfrm>
-            <a:off x="-182880" y="6144768"/>
-            <a:ext cx="12557455" cy="731520"/>
+            <a:off x="640080" y="566928"/>
+            <a:ext cx="10911535" cy="10972"/>
+          </a:xfrm>
+          <a:prstGeom prst="rect">
+            <a:avLst/>
+          </a:prstGeom>
+          <a:solidFill>
+            <a:srgbClr val="26231F"/>
+          </a:solidFill>
+          <a:ln>
+            <a:noFill/>
+          </a:ln>
+        </p:spPr>
+        <p:txBody>
+          <a:bodyPr rtlCol="0" anchor="ctr"/>
+          <a:lstStyle/>
+          <a:p>
+            <a:pPr algn="ctr"/>
+          </a:p>
+        </p:txBody>
+      </p:sp>
+      <p:sp>
+        <p:nvSpPr>
+          <p:cNvPr id="4" name="상단 라벨"/>
+          <p:cNvSpPr txBox="1"/>
+          <p:nvPr/>
+        </p:nvSpPr>
+        <p:spPr>
+          <a:xfrm>
+            <a:off x="640080" y="237744"/>
+            <a:ext cx="5486400" cy="274320"/>
+          </a:xfrm>
+          <a:prstGeom prst="rect">
+            <a:avLst/>
+          </a:prstGeom>
+          <a:noFill/>
+        </p:spPr>
+        <p:txBody>
+          <a:bodyPr wrap="square" lIns="54864" rIns="54864" tIns="27432" bIns="27432" anchor="ctr">
+            <a:noAutofit/>
+          </a:bodyPr>
+          <a:lstStyle/>
+          <a:p>
+            <a:pPr algn="l">
+              <a:lnSpc>
+                <a:spcPct val="115000"/>
+              </a:lnSpc>
+            </a:pPr>
+            <a:r>
+              <a:rPr sz="900" b="1" i="0" spc="250">
+                <a:solidFill>
+                  <a:srgbClr val="26231F"/>
+                </a:solidFill>
+              </a:rPr>
+              <a:t>FIRST BIRTHDAY</a:t>
+            </a:r>
+          </a:p>
+        </p:txBody>
+      </p:sp>
+      <p:sp>
+        <p:nvSpPr>
+          <p:cNvPr id="5" name="포인트"/>
+          <p:cNvSpPr/>
+          <p:nvPr/>
+        </p:nvSpPr>
+        <p:spPr>
+          <a:xfrm>
+            <a:off x="11204143" y="246888"/>
+            <a:ext cx="237744" cy="95097"/>
           </a:xfrm>
           <a:prstGeom prst="wave">
             <a:avLst/>
           </a:prstGeom>
           <a:solidFill>
-            <a:srgbClr val="D1FAF8"/>
-          </a:solidFill>
-          <a:ln>
-            <a:noFill/>
-          </a:ln>
-        </p:spPr>
-        <p:txBody>
-          <a:bodyPr rtlCol="0" anchor="ctr"/>
-          <a:lstStyle/>
-          <a:p>
-            <a:pPr algn="ctr"/>
-          </a:p>
-        </p:txBody>
-      </p:sp>
-      <p:sp>
-        <p:nvSpPr>
-          <p:cNvPr id="4" name="장식"/>
-          <p:cNvSpPr/>
-          <p:nvPr/>
-        </p:nvSpPr>
-        <p:spPr>
-          <a:xfrm>
-            <a:off x="-182880" y="6400800"/>
-            <a:ext cx="12557455" cy="502920"/>
-          </a:xfrm>
-          <a:prstGeom prst="wave">
-            <a:avLst/>
-          </a:prstGeom>
-          <a:solidFill>
-            <a:srgbClr val="26C5BD"/>
+            <a:srgbClr val="7BEAB3"/>
           </a:solidFill>
           <a:ln>
             <a:noFill/>
@@ -3542,8 +3677,8 @@
         </p:nvSpPr>
         <p:spPr>
           <a:xfrm>
-            <a:off x="640080" y="457200"/>
-            <a:ext cx="9722815" cy="868680"/>
+            <a:off x="640080" y="731520"/>
+            <a:ext cx="10911535" cy="822960"/>
           </a:xfrm>
         </p:spPr>
         <p:txBody>
@@ -3560,7 +3695,7 @@
             <a:r>
               <a:rPr sz="3000" b="1" i="0">
                 <a:solidFill>
-                  <a:srgbClr val="115F5B"/>
+                  <a:srgbClr val="26231F"/>
                 </a:solidFill>
               </a:rPr>
               <a:t>우리 아기를 소개합니다</a:t>
@@ -3570,14 +3705,14 @@
       </p:sp>
       <p:sp>
         <p:nvSpPr>
-          <p:cNvPr id="5" name="사진 자리"/>
+          <p:cNvPr id="6" name="사진 자리"/>
           <p:cNvSpPr/>
           <p:nvPr/>
         </p:nvSpPr>
         <p:spPr>
           <a:xfrm>
-            <a:off x="640080" y="1554480"/>
-            <a:ext cx="3840480" cy="4206240"/>
+            <a:off x="640080" y="1783080"/>
+            <a:ext cx="3840480" cy="4389120"/>
           </a:xfrm>
           <a:prstGeom prst="roundRect">
             <a:avLst>
@@ -3585,12 +3720,10 @@
             </a:avLst>
           </a:prstGeom>
           <a:solidFill>
-            <a:srgbClr val="D1FAF8"/>
+            <a:srgbClr val="D1FAE6"/>
           </a:solidFill>
           <a:ln w="19050">
-            <a:solidFill>
-              <a:srgbClr val="26C5BD"/>
-            </a:solidFill>
+            <a:noFill/>
             <a:prstDash val="dash"/>
           </a:ln>
         </p:spPr>
@@ -3608,7 +3741,7 @@
             <a:r>
               <a:rPr sz="1400" b="0" i="0">
                 <a:solidFill>
-                  <a:srgbClr val="115F5B"/>
+                  <a:srgbClr val="8E8780"/>
                 </a:solidFill>
               </a:rPr>
               <a:t>아기 사진을 넣어 주세요</a:t>
@@ -3618,14 +3751,14 @@
       </p:sp>
       <p:graphicFrame>
         <p:nvGraphicFramePr>
-          <p:cNvPr id="6" name="표"/>
+          <p:cNvPr id="7" name="표"/>
           <p:cNvGraphicFramePr>
             <a:graphicFrameLocks noGrp="1"/>
           </p:cNvGraphicFramePr>
           <p:nvPr/>
         </p:nvGraphicFramePr>
         <p:xfrm>
-          <a:off x="4846320" y="1554480"/>
+          <a:off x="4846320" y="1783080"/>
           <a:ext cx="6705295" cy="3950208"/>
         </p:xfrm>
         <a:graphic>
@@ -3648,7 +3781,7 @@
                       <a:r>
                         <a:rPr sz="1500" b="1">
                           <a:solidFill>
-                            <a:srgbClr val="115F5B"/>
+                            <a:srgbClr val="274938"/>
                           </a:solidFill>
                         </a:rPr>
                         <a:t>이름</a:t>
@@ -3658,30 +3791,30 @@
                   <a:tcPr anchor="ctr" marL="73152" marR="73152">
                     <a:lnL w="9525" cap="flat" cmpd="sng" algn="ctr">
                       <a:solidFill>
-                        <a:srgbClr val="D1FAF8"/>
+                        <a:srgbClr val="D1FAE6"/>
                       </a:solidFill>
                       <a:prstDash val="solid"/>
                     </a:lnL>
                     <a:lnR w="9525" cap="flat" cmpd="sng" algn="ctr">
                       <a:solidFill>
-                        <a:srgbClr val="D1FAF8"/>
+                        <a:srgbClr val="D1FAE6"/>
                       </a:solidFill>
                       <a:prstDash val="solid"/>
                     </a:lnR>
                     <a:lnT w="9525" cap="flat" cmpd="sng" algn="ctr">
                       <a:solidFill>
-                        <a:srgbClr val="D1FAF8"/>
+                        <a:srgbClr val="D1FAE6"/>
                       </a:solidFill>
                       <a:prstDash val="solid"/>
                     </a:lnT>
                     <a:lnB w="9525" cap="flat" cmpd="sng" algn="ctr">
                       <a:solidFill>
-                        <a:srgbClr val="D1FAF8"/>
+                        <a:srgbClr val="D1FAE6"/>
                       </a:solidFill>
                       <a:prstDash val="solid"/>
                     </a:lnB>
                     <a:solidFill>
-                      <a:srgbClr val="D1FAF8"/>
+                      <a:srgbClr val="D1FAE6"/>
                     </a:solidFill>
                   </a:tcPr>
                 </a:tc>
@@ -3694,7 +3827,7 @@
                       <a:r>
                         <a:rPr sz="1500" b="0">
                           <a:solidFill>
-                            <a:srgbClr val="2B2B2B"/>
+                            <a:srgbClr val="26231F"/>
                           </a:solidFill>
                         </a:rPr>
                         <a:t>입력하세요</a:t>
@@ -3704,30 +3837,30 @@
                   <a:tcPr anchor="ctr" marL="73152" marR="73152">
                     <a:lnL w="9525" cap="flat" cmpd="sng" algn="ctr">
                       <a:solidFill>
-                        <a:srgbClr val="D1FAF8"/>
+                        <a:srgbClr val="D1FAE6"/>
                       </a:solidFill>
                       <a:prstDash val="solid"/>
                     </a:lnL>
                     <a:lnR w="9525" cap="flat" cmpd="sng" algn="ctr">
                       <a:solidFill>
-                        <a:srgbClr val="D1FAF8"/>
+                        <a:srgbClr val="D1FAE6"/>
                       </a:solidFill>
                       <a:prstDash val="solid"/>
                     </a:lnR>
                     <a:lnT w="9525" cap="flat" cmpd="sng" algn="ctr">
                       <a:solidFill>
-                        <a:srgbClr val="D1FAF8"/>
+                        <a:srgbClr val="D1FAE6"/>
                       </a:solidFill>
                       <a:prstDash val="solid"/>
                     </a:lnT>
                     <a:lnB w="9525" cap="flat" cmpd="sng" algn="ctr">
                       <a:solidFill>
-                        <a:srgbClr val="D1FAF8"/>
+                        <a:srgbClr val="D1FAE6"/>
                       </a:solidFill>
                       <a:prstDash val="solid"/>
                     </a:lnB>
                     <a:solidFill>
-                      <a:srgbClr val="EEFCFB"/>
+                      <a:srgbClr val="EAFDF4"/>
                     </a:solidFill>
                   </a:tcPr>
                 </a:tc>
@@ -3742,7 +3875,7 @@
                       <a:r>
                         <a:rPr sz="1500" b="1">
                           <a:solidFill>
-                            <a:srgbClr val="115F5B"/>
+                            <a:srgbClr val="274938"/>
                           </a:solidFill>
                         </a:rPr>
                         <a:t>생일</a:t>
@@ -3752,30 +3885,30 @@
                   <a:tcPr anchor="ctr" marL="73152" marR="73152">
                     <a:lnL w="9525" cap="flat" cmpd="sng" algn="ctr">
                       <a:solidFill>
-                        <a:srgbClr val="D1FAF8"/>
+                        <a:srgbClr val="D1FAE6"/>
                       </a:solidFill>
                       <a:prstDash val="solid"/>
                     </a:lnL>
                     <a:lnR w="9525" cap="flat" cmpd="sng" algn="ctr">
                       <a:solidFill>
-                        <a:srgbClr val="D1FAF8"/>
+                        <a:srgbClr val="D1FAE6"/>
                       </a:solidFill>
                       <a:prstDash val="solid"/>
                     </a:lnR>
                     <a:lnT w="9525" cap="flat" cmpd="sng" algn="ctr">
                       <a:solidFill>
-                        <a:srgbClr val="D1FAF8"/>
+                        <a:srgbClr val="D1FAE6"/>
                       </a:solidFill>
                       <a:prstDash val="solid"/>
                     </a:lnT>
                     <a:lnB w="9525" cap="flat" cmpd="sng" algn="ctr">
                       <a:solidFill>
-                        <a:srgbClr val="D1FAF8"/>
+                        <a:srgbClr val="D1FAE6"/>
                       </a:solidFill>
                       <a:prstDash val="solid"/>
                     </a:lnB>
                     <a:solidFill>
-                      <a:srgbClr val="D1FAF8"/>
+                      <a:srgbClr val="D1FAE6"/>
                     </a:solidFill>
                   </a:tcPr>
                 </a:tc>
@@ -3788,7 +3921,7 @@
                       <a:r>
                         <a:rPr sz="1500" b="0">
                           <a:solidFill>
-                            <a:srgbClr val="2B2B2B"/>
+                            <a:srgbClr val="26231F"/>
                           </a:solidFill>
                         </a:rPr>
                         <a:t>입력하세요</a:t>
@@ -3798,25 +3931,25 @@
                   <a:tcPr anchor="ctr" marL="73152" marR="73152">
                     <a:lnL w="9525" cap="flat" cmpd="sng" algn="ctr">
                       <a:solidFill>
-                        <a:srgbClr val="D1FAF8"/>
+                        <a:srgbClr val="D1FAE6"/>
                       </a:solidFill>
                       <a:prstDash val="solid"/>
                     </a:lnL>
                     <a:lnR w="9525" cap="flat" cmpd="sng" algn="ctr">
                       <a:solidFill>
-                        <a:srgbClr val="D1FAF8"/>
+                        <a:srgbClr val="D1FAE6"/>
                       </a:solidFill>
                       <a:prstDash val="solid"/>
                     </a:lnR>
                     <a:lnT w="9525" cap="flat" cmpd="sng" algn="ctr">
                       <a:solidFill>
-                        <a:srgbClr val="D1FAF8"/>
+                        <a:srgbClr val="D1FAE6"/>
                       </a:solidFill>
                       <a:prstDash val="solid"/>
                     </a:lnT>
                     <a:lnB w="9525" cap="flat" cmpd="sng" algn="ctr">
                       <a:solidFill>
-                        <a:srgbClr val="D1FAF8"/>
+                        <a:srgbClr val="D1FAE6"/>
                       </a:solidFill>
                       <a:prstDash val="solid"/>
                     </a:lnB>
@@ -3836,7 +3969,7 @@
                       <a:r>
                         <a:rPr sz="1500" b="1">
                           <a:solidFill>
-                            <a:srgbClr val="115F5B"/>
+                            <a:srgbClr val="274938"/>
                           </a:solidFill>
                         </a:rPr>
                         <a:t>키 · 몸무게</a:t>
@@ -3846,30 +3979,30 @@
                   <a:tcPr anchor="ctr" marL="73152" marR="73152">
                     <a:lnL w="9525" cap="flat" cmpd="sng" algn="ctr">
                       <a:solidFill>
-                        <a:srgbClr val="D1FAF8"/>
+                        <a:srgbClr val="D1FAE6"/>
                       </a:solidFill>
                       <a:prstDash val="solid"/>
                     </a:lnL>
                     <a:lnR w="9525" cap="flat" cmpd="sng" algn="ctr">
                       <a:solidFill>
-                        <a:srgbClr val="D1FAF8"/>
+                        <a:srgbClr val="D1FAE6"/>
                       </a:solidFill>
                       <a:prstDash val="solid"/>
                     </a:lnR>
                     <a:lnT w="9525" cap="flat" cmpd="sng" algn="ctr">
                       <a:solidFill>
-                        <a:srgbClr val="D1FAF8"/>
+                        <a:srgbClr val="D1FAE6"/>
                       </a:solidFill>
                       <a:prstDash val="solid"/>
                     </a:lnT>
                     <a:lnB w="9525" cap="flat" cmpd="sng" algn="ctr">
                       <a:solidFill>
-                        <a:srgbClr val="D1FAF8"/>
+                        <a:srgbClr val="D1FAE6"/>
                       </a:solidFill>
                       <a:prstDash val="solid"/>
                     </a:lnB>
                     <a:solidFill>
-                      <a:srgbClr val="D1FAF8"/>
+                      <a:srgbClr val="D1FAE6"/>
                     </a:solidFill>
                   </a:tcPr>
                 </a:tc>
@@ -3882,7 +4015,7 @@
                       <a:r>
                         <a:rPr sz="1500" b="0">
                           <a:solidFill>
-                            <a:srgbClr val="2B2B2B"/>
+                            <a:srgbClr val="26231F"/>
                           </a:solidFill>
                         </a:rPr>
                         <a:t>입력하세요</a:t>
@@ -3892,30 +4025,30 @@
                   <a:tcPr anchor="ctr" marL="73152" marR="73152">
                     <a:lnL w="9525" cap="flat" cmpd="sng" algn="ctr">
                       <a:solidFill>
-                        <a:srgbClr val="D1FAF8"/>
+                        <a:srgbClr val="D1FAE6"/>
                       </a:solidFill>
                       <a:prstDash val="solid"/>
                     </a:lnL>
                     <a:lnR w="9525" cap="flat" cmpd="sng" algn="ctr">
                       <a:solidFill>
-                        <a:srgbClr val="D1FAF8"/>
+                        <a:srgbClr val="D1FAE6"/>
                       </a:solidFill>
                       <a:prstDash val="solid"/>
                     </a:lnR>
                     <a:lnT w="9525" cap="flat" cmpd="sng" algn="ctr">
                       <a:solidFill>
-                        <a:srgbClr val="D1FAF8"/>
+                        <a:srgbClr val="D1FAE6"/>
                       </a:solidFill>
                       <a:prstDash val="solid"/>
                     </a:lnT>
                     <a:lnB w="9525" cap="flat" cmpd="sng" algn="ctr">
                       <a:solidFill>
-                        <a:srgbClr val="D1FAF8"/>
+                        <a:srgbClr val="D1FAE6"/>
                       </a:solidFill>
                       <a:prstDash val="solid"/>
                     </a:lnB>
                     <a:solidFill>
-                      <a:srgbClr val="EEFCFB"/>
+                      <a:srgbClr val="EAFDF4"/>
                     </a:solidFill>
                   </a:tcPr>
                 </a:tc>
@@ -3930,7 +4063,7 @@
                       <a:r>
                         <a:rPr sz="1500" b="1">
                           <a:solidFill>
-                            <a:srgbClr val="115F5B"/>
+                            <a:srgbClr val="274938"/>
                           </a:solidFill>
                         </a:rPr>
                         <a:t>좋아하는 것</a:t>
@@ -3940,30 +4073,30 @@
                   <a:tcPr anchor="ctr" marL="73152" marR="73152">
                     <a:lnL w="9525" cap="flat" cmpd="sng" algn="ctr">
                       <a:solidFill>
-                        <a:srgbClr val="D1FAF8"/>
+                        <a:srgbClr val="D1FAE6"/>
                       </a:solidFill>
                       <a:prstDash val="solid"/>
                     </a:lnL>
                     <a:lnR w="9525" cap="flat" cmpd="sng" algn="ctr">
                       <a:solidFill>
-                        <a:srgbClr val="D1FAF8"/>
+                        <a:srgbClr val="D1FAE6"/>
                       </a:solidFill>
                       <a:prstDash val="solid"/>
                     </a:lnR>
                     <a:lnT w="9525" cap="flat" cmpd="sng" algn="ctr">
                       <a:solidFill>
-                        <a:srgbClr val="D1FAF8"/>
+                        <a:srgbClr val="D1FAE6"/>
                       </a:solidFill>
                       <a:prstDash val="solid"/>
                     </a:lnT>
                     <a:lnB w="9525" cap="flat" cmpd="sng" algn="ctr">
                       <a:solidFill>
-                        <a:srgbClr val="D1FAF8"/>
+                        <a:srgbClr val="D1FAE6"/>
                       </a:solidFill>
                       <a:prstDash val="solid"/>
                     </a:lnB>
                     <a:solidFill>
-                      <a:srgbClr val="D1FAF8"/>
+                      <a:srgbClr val="D1FAE6"/>
                     </a:solidFill>
                   </a:tcPr>
                 </a:tc>
@@ -3976,7 +4109,7 @@
                       <a:r>
                         <a:rPr sz="1500" b="0">
                           <a:solidFill>
-                            <a:srgbClr val="2B2B2B"/>
+                            <a:srgbClr val="26231F"/>
                           </a:solidFill>
                         </a:rPr>
                         <a:t>입력하세요</a:t>
@@ -3986,25 +4119,25 @@
                   <a:tcPr anchor="ctr" marL="73152" marR="73152">
                     <a:lnL w="9525" cap="flat" cmpd="sng" algn="ctr">
                       <a:solidFill>
-                        <a:srgbClr val="D1FAF8"/>
+                        <a:srgbClr val="D1FAE6"/>
                       </a:solidFill>
                       <a:prstDash val="solid"/>
                     </a:lnL>
                     <a:lnR w="9525" cap="flat" cmpd="sng" algn="ctr">
                       <a:solidFill>
-                        <a:srgbClr val="D1FAF8"/>
+                        <a:srgbClr val="D1FAE6"/>
                       </a:solidFill>
                       <a:prstDash val="solid"/>
                     </a:lnR>
                     <a:lnT w="9525" cap="flat" cmpd="sng" algn="ctr">
                       <a:solidFill>
-                        <a:srgbClr val="D1FAF8"/>
+                        <a:srgbClr val="D1FAE6"/>
                       </a:solidFill>
                       <a:prstDash val="solid"/>
                     </a:lnT>
                     <a:lnB w="9525" cap="flat" cmpd="sng" algn="ctr">
                       <a:solidFill>
-                        <a:srgbClr val="D1FAF8"/>
+                        <a:srgbClr val="D1FAE6"/>
                       </a:solidFill>
                       <a:prstDash val="solid"/>
                     </a:lnB>
@@ -4024,7 +4157,7 @@
                       <a:r>
                         <a:rPr sz="1500" b="1">
                           <a:solidFill>
-                            <a:srgbClr val="115F5B"/>
+                            <a:srgbClr val="274938"/>
                           </a:solidFill>
                         </a:rPr>
                         <a:t>별명</a:t>
@@ -4034,30 +4167,30 @@
                   <a:tcPr anchor="ctr" marL="73152" marR="73152">
                     <a:lnL w="9525" cap="flat" cmpd="sng" algn="ctr">
                       <a:solidFill>
-                        <a:srgbClr val="D1FAF8"/>
+                        <a:srgbClr val="D1FAE6"/>
                       </a:solidFill>
                       <a:prstDash val="solid"/>
                     </a:lnL>
                     <a:lnR w="9525" cap="flat" cmpd="sng" algn="ctr">
                       <a:solidFill>
-                        <a:srgbClr val="D1FAF8"/>
+                        <a:srgbClr val="D1FAE6"/>
                       </a:solidFill>
                       <a:prstDash val="solid"/>
                     </a:lnR>
                     <a:lnT w="9525" cap="flat" cmpd="sng" algn="ctr">
                       <a:solidFill>
-                        <a:srgbClr val="D1FAF8"/>
+                        <a:srgbClr val="D1FAE6"/>
                       </a:solidFill>
                       <a:prstDash val="solid"/>
                     </a:lnT>
                     <a:lnB w="9525" cap="flat" cmpd="sng" algn="ctr">
                       <a:solidFill>
-                        <a:srgbClr val="D1FAF8"/>
+                        <a:srgbClr val="D1FAE6"/>
                       </a:solidFill>
                       <a:prstDash val="solid"/>
                     </a:lnB>
                     <a:solidFill>
-                      <a:srgbClr val="D1FAF8"/>
+                      <a:srgbClr val="D1FAE6"/>
                     </a:solidFill>
                   </a:tcPr>
                 </a:tc>
@@ -4070,7 +4203,7 @@
                       <a:r>
                         <a:rPr sz="1500" b="0">
                           <a:solidFill>
-                            <a:srgbClr val="2B2B2B"/>
+                            <a:srgbClr val="26231F"/>
                           </a:solidFill>
                         </a:rPr>
                         <a:t>입력하세요</a:t>
@@ -4080,30 +4213,30 @@
                   <a:tcPr anchor="ctr" marL="73152" marR="73152">
                     <a:lnL w="9525" cap="flat" cmpd="sng" algn="ctr">
                       <a:solidFill>
-                        <a:srgbClr val="D1FAF8"/>
+                        <a:srgbClr val="D1FAE6"/>
                       </a:solidFill>
                       <a:prstDash val="solid"/>
                     </a:lnL>
                     <a:lnR w="9525" cap="flat" cmpd="sng" algn="ctr">
                       <a:solidFill>
-                        <a:srgbClr val="D1FAF8"/>
+                        <a:srgbClr val="D1FAE6"/>
                       </a:solidFill>
                       <a:prstDash val="solid"/>
                     </a:lnR>
                     <a:lnT w="9525" cap="flat" cmpd="sng" algn="ctr">
                       <a:solidFill>
-                        <a:srgbClr val="D1FAF8"/>
+                        <a:srgbClr val="D1FAE6"/>
                       </a:solidFill>
                       <a:prstDash val="solid"/>
                     </a:lnT>
                     <a:lnB w="9525" cap="flat" cmpd="sng" algn="ctr">
                       <a:solidFill>
-                        <a:srgbClr val="D1FAF8"/>
+                        <a:srgbClr val="D1FAE6"/>
                       </a:solidFill>
                       <a:prstDash val="solid"/>
                     </a:lnB>
                     <a:solidFill>
-                      <a:srgbClr val="EEFCFB"/>
+                      <a:srgbClr val="EAFDF4"/>
                     </a:solidFill>
                   </a:tcPr>
                 </a:tc>
@@ -4118,7 +4251,7 @@
                       <a:r>
                         <a:rPr sz="1500" b="1">
                           <a:solidFill>
-                            <a:srgbClr val="115F5B"/>
+                            <a:srgbClr val="274938"/>
                           </a:solidFill>
                         </a:rPr>
                         <a:t>부모의 마음</a:t>
@@ -4128,30 +4261,30 @@
                   <a:tcPr anchor="ctr" marL="73152" marR="73152">
                     <a:lnL w="9525" cap="flat" cmpd="sng" algn="ctr">
                       <a:solidFill>
-                        <a:srgbClr val="D1FAF8"/>
+                        <a:srgbClr val="D1FAE6"/>
                       </a:solidFill>
                       <a:prstDash val="solid"/>
                     </a:lnL>
                     <a:lnR w="9525" cap="flat" cmpd="sng" algn="ctr">
                       <a:solidFill>
-                        <a:srgbClr val="D1FAF8"/>
+                        <a:srgbClr val="D1FAE6"/>
                       </a:solidFill>
                       <a:prstDash val="solid"/>
                     </a:lnR>
                     <a:lnT w="9525" cap="flat" cmpd="sng" algn="ctr">
                       <a:solidFill>
-                        <a:srgbClr val="D1FAF8"/>
+                        <a:srgbClr val="D1FAE6"/>
                       </a:solidFill>
                       <a:prstDash val="solid"/>
                     </a:lnT>
                     <a:lnB w="9525" cap="flat" cmpd="sng" algn="ctr">
                       <a:solidFill>
-                        <a:srgbClr val="D1FAF8"/>
+                        <a:srgbClr val="D1FAE6"/>
                       </a:solidFill>
                       <a:prstDash val="solid"/>
                     </a:lnB>
                     <a:solidFill>
-                      <a:srgbClr val="D1FAF8"/>
+                      <a:srgbClr val="D1FAE6"/>
                     </a:solidFill>
                   </a:tcPr>
                 </a:tc>
@@ -4164,7 +4297,7 @@
                       <a:r>
                         <a:rPr sz="1500" b="0">
                           <a:solidFill>
-                            <a:srgbClr val="2B2B2B"/>
+                            <a:srgbClr val="26231F"/>
                           </a:solidFill>
                         </a:rPr>
                         <a:t>입력하세요</a:t>
@@ -4174,25 +4307,25 @@
                   <a:tcPr anchor="ctr" marL="73152" marR="73152">
                     <a:lnL w="9525" cap="flat" cmpd="sng" algn="ctr">
                       <a:solidFill>
-                        <a:srgbClr val="D1FAF8"/>
+                        <a:srgbClr val="D1FAE6"/>
                       </a:solidFill>
                       <a:prstDash val="solid"/>
                     </a:lnL>
                     <a:lnR w="9525" cap="flat" cmpd="sng" algn="ctr">
                       <a:solidFill>
-                        <a:srgbClr val="D1FAF8"/>
+                        <a:srgbClr val="D1FAE6"/>
                       </a:solidFill>
                       <a:prstDash val="solid"/>
                     </a:lnR>
                     <a:lnT w="9525" cap="flat" cmpd="sng" algn="ctr">
                       <a:solidFill>
-                        <a:srgbClr val="D1FAF8"/>
+                        <a:srgbClr val="D1FAE6"/>
                       </a:solidFill>
                       <a:prstDash val="solid"/>
                     </a:lnT>
                     <a:lnB w="9525" cap="flat" cmpd="sng" algn="ctr">
                       <a:solidFill>
-                        <a:srgbClr val="D1FAF8"/>
+                        <a:srgbClr val="D1FAE6"/>
                       </a:solidFill>
                       <a:prstDash val="solid"/>
                     </a:lnB>
@@ -4220,7 +4353,7 @@
     <p:bg>
       <p:bgPr>
         <a:solidFill>
-          <a:srgbClr val="FFFFFF"/>
+          <a:srgbClr val="EAFDF4"/>
         </a:solidFill>
         <a:effectLst/>
       </p:bgPr>
@@ -4240,43 +4373,81 @@
         </p:nvSpPr>
         <p:spPr>
           <a:xfrm>
-            <a:off x="-182880" y="6144768"/>
-            <a:ext cx="12557455" cy="731520"/>
+            <a:off x="640080" y="566928"/>
+            <a:ext cx="10911535" cy="10972"/>
+          </a:xfrm>
+          <a:prstGeom prst="rect">
+            <a:avLst/>
+          </a:prstGeom>
+          <a:solidFill>
+            <a:srgbClr val="26231F"/>
+          </a:solidFill>
+          <a:ln>
+            <a:noFill/>
+          </a:ln>
+        </p:spPr>
+        <p:txBody>
+          <a:bodyPr rtlCol="0" anchor="ctr"/>
+          <a:lstStyle/>
+          <a:p>
+            <a:pPr algn="ctr"/>
+          </a:p>
+        </p:txBody>
+      </p:sp>
+      <p:sp>
+        <p:nvSpPr>
+          <p:cNvPr id="4" name="상단 라벨"/>
+          <p:cNvSpPr txBox="1"/>
+          <p:nvPr/>
+        </p:nvSpPr>
+        <p:spPr>
+          <a:xfrm>
+            <a:off x="640080" y="237744"/>
+            <a:ext cx="5486400" cy="274320"/>
+          </a:xfrm>
+          <a:prstGeom prst="rect">
+            <a:avLst/>
+          </a:prstGeom>
+          <a:noFill/>
+        </p:spPr>
+        <p:txBody>
+          <a:bodyPr wrap="square" lIns="54864" rIns="54864" tIns="27432" bIns="27432" anchor="ctr">
+            <a:noAutofit/>
+          </a:bodyPr>
+          <a:lstStyle/>
+          <a:p>
+            <a:pPr algn="l">
+              <a:lnSpc>
+                <a:spcPct val="115000"/>
+              </a:lnSpc>
+            </a:pPr>
+            <a:r>
+              <a:rPr sz="900" b="1" i="0" spc="250">
+                <a:solidFill>
+                  <a:srgbClr val="26231F"/>
+                </a:solidFill>
+              </a:rPr>
+              <a:t>FIRST BIRTHDAY</a:t>
+            </a:r>
+          </a:p>
+        </p:txBody>
+      </p:sp>
+      <p:sp>
+        <p:nvSpPr>
+          <p:cNvPr id="5" name="포인트"/>
+          <p:cNvSpPr/>
+          <p:nvPr/>
+        </p:nvSpPr>
+        <p:spPr>
+          <a:xfrm>
+            <a:off x="11204143" y="246888"/>
+            <a:ext cx="237744" cy="95097"/>
           </a:xfrm>
           <a:prstGeom prst="wave">
             <a:avLst/>
           </a:prstGeom>
           <a:solidFill>
-            <a:srgbClr val="D1FAF8"/>
-          </a:solidFill>
-          <a:ln>
-            <a:noFill/>
-          </a:ln>
-        </p:spPr>
-        <p:txBody>
-          <a:bodyPr rtlCol="0" anchor="ctr"/>
-          <a:lstStyle/>
-          <a:p>
-            <a:pPr algn="ctr"/>
-          </a:p>
-        </p:txBody>
-      </p:sp>
-      <p:sp>
-        <p:nvSpPr>
-          <p:cNvPr id="4" name="장식"/>
-          <p:cNvSpPr/>
-          <p:nvPr/>
-        </p:nvSpPr>
-        <p:spPr>
-          <a:xfrm>
-            <a:off x="-182880" y="6400800"/>
-            <a:ext cx="12557455" cy="502920"/>
-          </a:xfrm>
-          <a:prstGeom prst="wave">
-            <a:avLst/>
-          </a:prstGeom>
-          <a:solidFill>
-            <a:srgbClr val="26C5BD"/>
+            <a:srgbClr val="7BEAB3"/>
           </a:solidFill>
           <a:ln>
             <a:noFill/>
@@ -4302,8 +4473,8 @@
         </p:nvSpPr>
         <p:spPr>
           <a:xfrm>
-            <a:off x="640080" y="457200"/>
-            <a:ext cx="9722815" cy="868680"/>
+            <a:off x="640080" y="731520"/>
+            <a:ext cx="10911535" cy="822960"/>
           </a:xfrm>
         </p:spPr>
         <p:txBody>
@@ -4320,7 +4491,7 @@
             <a:r>
               <a:rPr sz="3000" b="1" i="0">
                 <a:solidFill>
-                  <a:srgbClr val="115F5B"/>
+                  <a:srgbClr val="26231F"/>
                 </a:solidFill>
               </a:rPr>
               <a:t>한 해 성장 기록</a:t>
@@ -4330,20 +4501,20 @@
       </p:sp>
       <p:sp>
         <p:nvSpPr>
-          <p:cNvPr id="5" name="타임라인 선"/>
+          <p:cNvPr id="6" name="타임라인 선"/>
           <p:cNvSpPr/>
           <p:nvPr/>
         </p:nvSpPr>
         <p:spPr>
           <a:xfrm>
-            <a:off x="640080" y="3291840"/>
+            <a:off x="640080" y="3520440"/>
             <a:ext cx="10911535" cy="54864"/>
           </a:xfrm>
           <a:prstGeom prst="rect">
             <a:avLst/>
           </a:prstGeom>
           <a:solidFill>
-            <a:srgbClr val="D1FAF8"/>
+            <a:srgbClr val="D1FAE6"/>
           </a:solidFill>
           <a:ln>
             <a:noFill/>
@@ -4359,20 +4530,20 @@
       </p:sp>
       <p:sp>
         <p:nvSpPr>
-          <p:cNvPr id="6" name="때 1"/>
+          <p:cNvPr id="7" name="때 1"/>
           <p:cNvSpPr/>
           <p:nvPr/>
         </p:nvSpPr>
         <p:spPr>
           <a:xfrm>
-            <a:off x="1530065" y="3108960"/>
+            <a:off x="1530065" y="3337560"/>
             <a:ext cx="402336" cy="402336"/>
           </a:xfrm>
           <a:prstGeom prst="ellipse">
             <a:avLst/>
           </a:prstGeom>
           <a:solidFill>
-            <a:srgbClr val="26C5BD"/>
+            <a:srgbClr val="7BEAB3"/>
           </a:solidFill>
           <a:ln w="38100">
             <a:solidFill>
@@ -4390,13 +4561,13 @@
       </p:sp>
       <p:sp>
         <p:nvSpPr>
-          <p:cNvPr id="7" name="TextBox 6"/>
+          <p:cNvPr id="8" name="TextBox 7"/>
           <p:cNvSpPr txBox="1"/>
           <p:nvPr/>
         </p:nvSpPr>
         <p:spPr>
           <a:xfrm>
-            <a:off x="685800" y="2468880"/>
+            <a:off x="685800" y="2697480"/>
             <a:ext cx="2090867" cy="457200"/>
           </a:xfrm>
           <a:prstGeom prst="rect">
@@ -4418,7 +4589,7 @@
             <a:r>
               <a:rPr sz="1400" b="1" i="0">
                 <a:solidFill>
-                  <a:srgbClr val="26C5BD"/>
+                  <a:srgbClr val="7BEAB3"/>
                 </a:solidFill>
               </a:rPr>
               <a:t>1개월</a:t>
@@ -4428,13 +4599,13 @@
       </p:sp>
       <p:sp>
         <p:nvSpPr>
-          <p:cNvPr id="8" name="TextBox 7"/>
+          <p:cNvPr id="9" name="TextBox 8"/>
           <p:cNvSpPr txBox="1"/>
           <p:nvPr/>
         </p:nvSpPr>
         <p:spPr>
           <a:xfrm>
-            <a:off x="731519" y="3657600"/>
+            <a:off x="731519" y="3886200"/>
             <a:ext cx="1999427" cy="457200"/>
           </a:xfrm>
           <a:prstGeom prst="rect">
@@ -4456,7 +4627,7 @@
             <a:r>
               <a:rPr sz="1600" b="1" i="0">
                 <a:solidFill>
-                  <a:srgbClr val="115F5B"/>
+                  <a:srgbClr val="274938"/>
                 </a:solidFill>
               </a:rPr>
               <a:t>처음 눈을 맞춘 날</a:t>
@@ -4466,13 +4637,13 @@
       </p:sp>
       <p:sp>
         <p:nvSpPr>
-          <p:cNvPr id="9" name="TextBox 8"/>
+          <p:cNvPr id="10" name="TextBox 9"/>
           <p:cNvSpPr txBox="1"/>
           <p:nvPr/>
         </p:nvSpPr>
         <p:spPr>
           <a:xfrm>
-            <a:off x="731519" y="4160520"/>
+            <a:off x="731519" y="4389120"/>
             <a:ext cx="1999427" cy="1645920"/>
           </a:xfrm>
           <a:prstGeom prst="rect">
@@ -4494,7 +4665,7 @@
             <a:r>
               <a:rPr sz="1300" b="0" i="0">
                 <a:solidFill>
-                  <a:srgbClr val="2B2B2B"/>
+                  <a:srgbClr val="26231F"/>
                 </a:solidFill>
               </a:rPr>
               <a:t>기억을 적어 주세요</a:t>
@@ -4504,20 +4675,20 @@
       </p:sp>
       <p:sp>
         <p:nvSpPr>
-          <p:cNvPr id="10" name="때 2"/>
+          <p:cNvPr id="11" name="때 2"/>
           <p:cNvSpPr/>
           <p:nvPr/>
         </p:nvSpPr>
         <p:spPr>
           <a:xfrm>
-            <a:off x="3712372" y="3108960"/>
+            <a:off x="3712372" y="3337560"/>
             <a:ext cx="402336" cy="402336"/>
           </a:xfrm>
           <a:prstGeom prst="ellipse">
             <a:avLst/>
           </a:prstGeom>
           <a:solidFill>
-            <a:srgbClr val="26C5BD"/>
+            <a:srgbClr val="7BEAB3"/>
           </a:solidFill>
           <a:ln w="38100">
             <a:solidFill>
@@ -4535,13 +4706,13 @@
       </p:sp>
       <p:sp>
         <p:nvSpPr>
-          <p:cNvPr id="11" name="TextBox 10"/>
+          <p:cNvPr id="12" name="TextBox 11"/>
           <p:cNvSpPr txBox="1"/>
           <p:nvPr/>
         </p:nvSpPr>
         <p:spPr>
           <a:xfrm>
-            <a:off x="2868107" y="2468880"/>
+            <a:off x="2868107" y="2697480"/>
             <a:ext cx="2090867" cy="457200"/>
           </a:xfrm>
           <a:prstGeom prst="rect">
@@ -4563,7 +4734,7 @@
             <a:r>
               <a:rPr sz="1400" b="1" i="0">
                 <a:solidFill>
-                  <a:srgbClr val="26C5BD"/>
+                  <a:srgbClr val="7BEAB3"/>
                 </a:solidFill>
               </a:rPr>
               <a:t>3개월</a:t>
@@ -4573,13 +4744,13 @@
       </p:sp>
       <p:sp>
         <p:nvSpPr>
-          <p:cNvPr id="12" name="TextBox 11"/>
+          <p:cNvPr id="13" name="TextBox 12"/>
           <p:cNvSpPr txBox="1"/>
           <p:nvPr/>
         </p:nvSpPr>
         <p:spPr>
           <a:xfrm>
-            <a:off x="2913827" y="3657600"/>
+            <a:off x="2913827" y="3886200"/>
             <a:ext cx="1999427" cy="457200"/>
           </a:xfrm>
           <a:prstGeom prst="rect">
@@ -4601,7 +4772,7 @@
             <a:r>
               <a:rPr sz="1600" b="1" i="0">
                 <a:solidFill>
-                  <a:srgbClr val="115F5B"/>
+                  <a:srgbClr val="274938"/>
                 </a:solidFill>
               </a:rPr>
               <a:t>처음 웃은 날</a:t>
@@ -4611,13 +4782,13 @@
       </p:sp>
       <p:sp>
         <p:nvSpPr>
-          <p:cNvPr id="13" name="TextBox 12"/>
+          <p:cNvPr id="14" name="TextBox 13"/>
           <p:cNvSpPr txBox="1"/>
           <p:nvPr/>
         </p:nvSpPr>
         <p:spPr>
           <a:xfrm>
-            <a:off x="2913827" y="4160520"/>
+            <a:off x="2913827" y="4389120"/>
             <a:ext cx="1999427" cy="1645920"/>
           </a:xfrm>
           <a:prstGeom prst="rect">
@@ -4639,7 +4810,7 @@
             <a:r>
               <a:rPr sz="1300" b="0" i="0">
                 <a:solidFill>
-                  <a:srgbClr val="2B2B2B"/>
+                  <a:srgbClr val="26231F"/>
                 </a:solidFill>
               </a:rPr>
               <a:t>기억을 적어 주세요</a:t>
@@ -4649,20 +4820,20 @@
       </p:sp>
       <p:sp>
         <p:nvSpPr>
-          <p:cNvPr id="14" name="때 3"/>
+          <p:cNvPr id="15" name="때 3"/>
           <p:cNvSpPr/>
           <p:nvPr/>
         </p:nvSpPr>
         <p:spPr>
           <a:xfrm>
-            <a:off x="5894679" y="3108960"/>
+            <a:off x="5894679" y="3337560"/>
             <a:ext cx="402336" cy="402336"/>
           </a:xfrm>
           <a:prstGeom prst="ellipse">
             <a:avLst/>
           </a:prstGeom>
           <a:solidFill>
-            <a:srgbClr val="26C5BD"/>
+            <a:srgbClr val="7BEAB3"/>
           </a:solidFill>
           <a:ln w="38100">
             <a:solidFill>
@@ -4680,13 +4851,13 @@
       </p:sp>
       <p:sp>
         <p:nvSpPr>
-          <p:cNvPr id="15" name="TextBox 14"/>
+          <p:cNvPr id="16" name="TextBox 15"/>
           <p:cNvSpPr txBox="1"/>
           <p:nvPr/>
         </p:nvSpPr>
         <p:spPr>
           <a:xfrm>
-            <a:off x="5050414" y="2468880"/>
+            <a:off x="5050414" y="2697480"/>
             <a:ext cx="2090867" cy="457200"/>
           </a:xfrm>
           <a:prstGeom prst="rect">
@@ -4708,7 +4879,7 @@
             <a:r>
               <a:rPr sz="1400" b="1" i="0">
                 <a:solidFill>
-                  <a:srgbClr val="26C5BD"/>
+                  <a:srgbClr val="7BEAB3"/>
                 </a:solidFill>
               </a:rPr>
               <a:t>6개월</a:t>
@@ -4718,13 +4889,13 @@
       </p:sp>
       <p:sp>
         <p:nvSpPr>
-          <p:cNvPr id="16" name="TextBox 15"/>
+          <p:cNvPr id="17" name="TextBox 16"/>
           <p:cNvSpPr txBox="1"/>
           <p:nvPr/>
         </p:nvSpPr>
         <p:spPr>
           <a:xfrm>
-            <a:off x="5096134" y="3657600"/>
+            <a:off x="5096134" y="3886200"/>
             <a:ext cx="1999427" cy="457200"/>
           </a:xfrm>
           <a:prstGeom prst="rect">
@@ -4746,7 +4917,7 @@
             <a:r>
               <a:rPr sz="1600" b="1" i="0">
                 <a:solidFill>
-                  <a:srgbClr val="115F5B"/>
+                  <a:srgbClr val="274938"/>
                 </a:solidFill>
               </a:rPr>
               <a:t>뒤집기 성공</a:t>
@@ -4756,13 +4927,13 @@
       </p:sp>
       <p:sp>
         <p:nvSpPr>
-          <p:cNvPr id="17" name="TextBox 16"/>
+          <p:cNvPr id="18" name="TextBox 17"/>
           <p:cNvSpPr txBox="1"/>
           <p:nvPr/>
         </p:nvSpPr>
         <p:spPr>
           <a:xfrm>
-            <a:off x="5096134" y="4160520"/>
+            <a:off x="5096134" y="4389120"/>
             <a:ext cx="1999427" cy="1645920"/>
           </a:xfrm>
           <a:prstGeom prst="rect">
@@ -4784,7 +4955,7 @@
             <a:r>
               <a:rPr sz="1300" b="0" i="0">
                 <a:solidFill>
-                  <a:srgbClr val="2B2B2B"/>
+                  <a:srgbClr val="26231F"/>
                 </a:solidFill>
               </a:rPr>
               <a:t>기억을 적어 주세요</a:t>
@@ -4794,20 +4965,20 @@
       </p:sp>
       <p:sp>
         <p:nvSpPr>
-          <p:cNvPr id="18" name="때 4"/>
+          <p:cNvPr id="19" name="때 4"/>
           <p:cNvSpPr/>
           <p:nvPr/>
         </p:nvSpPr>
         <p:spPr>
           <a:xfrm>
-            <a:off x="8076986" y="3108960"/>
+            <a:off x="8076986" y="3337560"/>
             <a:ext cx="402336" cy="402336"/>
           </a:xfrm>
           <a:prstGeom prst="ellipse">
             <a:avLst/>
           </a:prstGeom>
           <a:solidFill>
-            <a:srgbClr val="26C5BD"/>
+            <a:srgbClr val="7BEAB3"/>
           </a:solidFill>
           <a:ln w="38100">
             <a:solidFill>
@@ -4825,13 +4996,13 @@
       </p:sp>
       <p:sp>
         <p:nvSpPr>
-          <p:cNvPr id="19" name="TextBox 18"/>
+          <p:cNvPr id="20" name="TextBox 19"/>
           <p:cNvSpPr txBox="1"/>
           <p:nvPr/>
         </p:nvSpPr>
         <p:spPr>
           <a:xfrm>
-            <a:off x="7232721" y="2468880"/>
+            <a:off x="7232721" y="2697480"/>
             <a:ext cx="2090867" cy="457200"/>
           </a:xfrm>
           <a:prstGeom prst="rect">
@@ -4853,7 +5024,7 @@
             <a:r>
               <a:rPr sz="1400" b="1" i="0">
                 <a:solidFill>
-                  <a:srgbClr val="26C5BD"/>
+                  <a:srgbClr val="7BEAB3"/>
                 </a:solidFill>
               </a:rPr>
               <a:t>9개월</a:t>
@@ -4863,13 +5034,13 @@
       </p:sp>
       <p:sp>
         <p:nvSpPr>
-          <p:cNvPr id="20" name="TextBox 19"/>
+          <p:cNvPr id="21" name="TextBox 20"/>
           <p:cNvSpPr txBox="1"/>
           <p:nvPr/>
         </p:nvSpPr>
         <p:spPr>
           <a:xfrm>
-            <a:off x="7278441" y="3657600"/>
+            <a:off x="7278441" y="3886200"/>
             <a:ext cx="1999427" cy="457200"/>
           </a:xfrm>
           <a:prstGeom prst="rect">
@@ -4891,7 +5062,7 @@
             <a:r>
               <a:rPr sz="1600" b="1" i="0">
                 <a:solidFill>
-                  <a:srgbClr val="115F5B"/>
+                  <a:srgbClr val="274938"/>
                 </a:solidFill>
               </a:rPr>
               <a:t>첫 이유식</a:t>
@@ -4901,13 +5072,13 @@
       </p:sp>
       <p:sp>
         <p:nvSpPr>
-          <p:cNvPr id="21" name="TextBox 20"/>
+          <p:cNvPr id="22" name="TextBox 21"/>
           <p:cNvSpPr txBox="1"/>
           <p:nvPr/>
         </p:nvSpPr>
         <p:spPr>
           <a:xfrm>
-            <a:off x="7278441" y="4160520"/>
+            <a:off x="7278441" y="4389120"/>
             <a:ext cx="1999427" cy="1645920"/>
           </a:xfrm>
           <a:prstGeom prst="rect">
@@ -4929,7 +5100,7 @@
             <a:r>
               <a:rPr sz="1300" b="0" i="0">
                 <a:solidFill>
-                  <a:srgbClr val="2B2B2B"/>
+                  <a:srgbClr val="26231F"/>
                 </a:solidFill>
               </a:rPr>
               <a:t>기억을 적어 주세요</a:t>
@@ -4939,20 +5110,20 @@
       </p:sp>
       <p:sp>
         <p:nvSpPr>
-          <p:cNvPr id="22" name="때 5"/>
+          <p:cNvPr id="23" name="때 5"/>
           <p:cNvSpPr/>
           <p:nvPr/>
         </p:nvSpPr>
         <p:spPr>
           <a:xfrm>
-            <a:off x="10259293" y="3108960"/>
+            <a:off x="10259293" y="3337560"/>
             <a:ext cx="402336" cy="402336"/>
           </a:xfrm>
           <a:prstGeom prst="ellipse">
             <a:avLst/>
           </a:prstGeom>
           <a:solidFill>
-            <a:srgbClr val="26C5BD"/>
+            <a:srgbClr val="7BEAB3"/>
           </a:solidFill>
           <a:ln w="38100">
             <a:solidFill>
@@ -4970,13 +5141,13 @@
       </p:sp>
       <p:sp>
         <p:nvSpPr>
-          <p:cNvPr id="23" name="TextBox 22"/>
+          <p:cNvPr id="24" name="TextBox 23"/>
           <p:cNvSpPr txBox="1"/>
           <p:nvPr/>
         </p:nvSpPr>
         <p:spPr>
           <a:xfrm>
-            <a:off x="9415028" y="2468880"/>
+            <a:off x="9415028" y="2697480"/>
             <a:ext cx="2090867" cy="457200"/>
           </a:xfrm>
           <a:prstGeom prst="rect">
@@ -4998,7 +5169,7 @@
             <a:r>
               <a:rPr sz="1400" b="1" i="0">
                 <a:solidFill>
-                  <a:srgbClr val="26C5BD"/>
+                  <a:srgbClr val="7BEAB3"/>
                 </a:solidFill>
               </a:rPr>
               <a:t>12개월</a:t>
@@ -5008,13 +5179,13 @@
       </p:sp>
       <p:sp>
         <p:nvSpPr>
-          <p:cNvPr id="24" name="TextBox 23"/>
+          <p:cNvPr id="25" name="TextBox 24"/>
           <p:cNvSpPr txBox="1"/>
           <p:nvPr/>
         </p:nvSpPr>
         <p:spPr>
           <a:xfrm>
-            <a:off x="9460748" y="3657600"/>
+            <a:off x="9460748" y="3886200"/>
             <a:ext cx="1999427" cy="457200"/>
           </a:xfrm>
           <a:prstGeom prst="rect">
@@ -5036,7 +5207,7 @@
             <a:r>
               <a:rPr sz="1600" b="1" i="0">
                 <a:solidFill>
-                  <a:srgbClr val="115F5B"/>
+                  <a:srgbClr val="274938"/>
                 </a:solidFill>
               </a:rPr>
               <a:t>첫 걸음</a:t>
@@ -5046,13 +5217,13 @@
       </p:sp>
       <p:sp>
         <p:nvSpPr>
-          <p:cNvPr id="25" name="TextBox 24"/>
+          <p:cNvPr id="26" name="TextBox 25"/>
           <p:cNvSpPr txBox="1"/>
           <p:nvPr/>
         </p:nvSpPr>
         <p:spPr>
           <a:xfrm>
-            <a:off x="9460748" y="4160520"/>
+            <a:off x="9460748" y="4389120"/>
             <a:ext cx="1999427" cy="1645920"/>
           </a:xfrm>
           <a:prstGeom prst="rect">
@@ -5074,7 +5245,7 @@
             <a:r>
               <a:rPr sz="1300" b="0" i="0">
                 <a:solidFill>
-                  <a:srgbClr val="2B2B2B"/>
+                  <a:srgbClr val="26231F"/>
                 </a:solidFill>
               </a:rPr>
               <a:t>기억을 적어 주세요</a:t>
@@ -5096,7 +5267,7 @@
     <p:bg>
       <p:bgPr>
         <a:solidFill>
-          <a:srgbClr val="FFFFFF"/>
+          <a:srgbClr val="EAFDF4"/>
         </a:solidFill>
         <a:effectLst/>
       </p:bgPr>
@@ -5116,43 +5287,81 @@
         </p:nvSpPr>
         <p:spPr>
           <a:xfrm>
-            <a:off x="-182880" y="6144768"/>
-            <a:ext cx="12557455" cy="731520"/>
+            <a:off x="640080" y="566928"/>
+            <a:ext cx="10911535" cy="10972"/>
+          </a:xfrm>
+          <a:prstGeom prst="rect">
+            <a:avLst/>
+          </a:prstGeom>
+          <a:solidFill>
+            <a:srgbClr val="26231F"/>
+          </a:solidFill>
+          <a:ln>
+            <a:noFill/>
+          </a:ln>
+        </p:spPr>
+        <p:txBody>
+          <a:bodyPr rtlCol="0" anchor="ctr"/>
+          <a:lstStyle/>
+          <a:p>
+            <a:pPr algn="ctr"/>
+          </a:p>
+        </p:txBody>
+      </p:sp>
+      <p:sp>
+        <p:nvSpPr>
+          <p:cNvPr id="4" name="상단 라벨"/>
+          <p:cNvSpPr txBox="1"/>
+          <p:nvPr/>
+        </p:nvSpPr>
+        <p:spPr>
+          <a:xfrm>
+            <a:off x="640080" y="237744"/>
+            <a:ext cx="5486400" cy="274320"/>
+          </a:xfrm>
+          <a:prstGeom prst="rect">
+            <a:avLst/>
+          </a:prstGeom>
+          <a:noFill/>
+        </p:spPr>
+        <p:txBody>
+          <a:bodyPr wrap="square" lIns="54864" rIns="54864" tIns="27432" bIns="27432" anchor="ctr">
+            <a:noAutofit/>
+          </a:bodyPr>
+          <a:lstStyle/>
+          <a:p>
+            <a:pPr algn="l">
+              <a:lnSpc>
+                <a:spcPct val="115000"/>
+              </a:lnSpc>
+            </a:pPr>
+            <a:r>
+              <a:rPr sz="900" b="1" i="0" spc="250">
+                <a:solidFill>
+                  <a:srgbClr val="26231F"/>
+                </a:solidFill>
+              </a:rPr>
+              <a:t>FIRST BIRTHDAY</a:t>
+            </a:r>
+          </a:p>
+        </p:txBody>
+      </p:sp>
+      <p:sp>
+        <p:nvSpPr>
+          <p:cNvPr id="5" name="포인트"/>
+          <p:cNvSpPr/>
+          <p:nvPr/>
+        </p:nvSpPr>
+        <p:spPr>
+          <a:xfrm>
+            <a:off x="11204143" y="246888"/>
+            <a:ext cx="237744" cy="95097"/>
           </a:xfrm>
           <a:prstGeom prst="wave">
             <a:avLst/>
           </a:prstGeom>
           <a:solidFill>
-            <a:srgbClr val="D1FAF8"/>
-          </a:solidFill>
-          <a:ln>
-            <a:noFill/>
-          </a:ln>
-        </p:spPr>
-        <p:txBody>
-          <a:bodyPr rtlCol="0" anchor="ctr"/>
-          <a:lstStyle/>
-          <a:p>
-            <a:pPr algn="ctr"/>
-          </a:p>
-        </p:txBody>
-      </p:sp>
-      <p:sp>
-        <p:nvSpPr>
-          <p:cNvPr id="4" name="장식"/>
-          <p:cNvSpPr/>
-          <p:nvPr/>
-        </p:nvSpPr>
-        <p:spPr>
-          <a:xfrm>
-            <a:off x="-182880" y="6400800"/>
-            <a:ext cx="12557455" cy="502920"/>
-          </a:xfrm>
-          <a:prstGeom prst="wave">
-            <a:avLst/>
-          </a:prstGeom>
-          <a:solidFill>
-            <a:srgbClr val="26C5BD"/>
+            <a:srgbClr val="7BEAB3"/>
           </a:solidFill>
           <a:ln>
             <a:noFill/>
@@ -5178,8 +5387,8 @@
         </p:nvSpPr>
         <p:spPr>
           <a:xfrm>
-            <a:off x="640080" y="457200"/>
-            <a:ext cx="9722815" cy="868680"/>
+            <a:off x="640080" y="731520"/>
+            <a:ext cx="10911535" cy="822960"/>
           </a:xfrm>
         </p:spPr>
         <p:txBody>
@@ -5196,7 +5405,7 @@
             <a:r>
               <a:rPr sz="3000" b="1" i="0">
                 <a:solidFill>
-                  <a:srgbClr val="115F5B"/>
+                  <a:srgbClr val="26231F"/>
                 </a:solidFill>
               </a:rPr>
               <a:t>키와 몸무게</a:t>
@@ -5206,14 +5415,14 @@
       </p:sp>
       <p:graphicFrame>
         <p:nvGraphicFramePr>
-          <p:cNvPr id="5" name="표"/>
+          <p:cNvPr id="6" name="표"/>
           <p:cNvGraphicFramePr>
             <a:graphicFrameLocks noGrp="1"/>
           </p:cNvGraphicFramePr>
           <p:nvPr/>
         </p:nvGraphicFramePr>
         <p:xfrm>
-          <a:off x="640080" y="1554480"/>
+          <a:off x="640080" y="1783080"/>
           <a:ext cx="10911535" cy="3291840"/>
         </p:xfrm>
         <a:graphic>
@@ -5239,7 +5448,7 @@
                       <a:r>
                         <a:rPr sz="1600" b="1">
                           <a:solidFill>
-                            <a:srgbClr val="FFFFFF"/>
+                            <a:srgbClr val="26231F"/>
                           </a:solidFill>
                         </a:rPr>
                         <a:t/>
@@ -5249,30 +5458,30 @@
                   <a:tcPr anchor="ctr" marL="73152" marR="73152">
                     <a:lnL w="9525" cap="flat" cmpd="sng" algn="ctr">
                       <a:solidFill>
-                        <a:srgbClr val="26C5BD"/>
+                        <a:srgbClr val="7BEAB3"/>
                       </a:solidFill>
                       <a:prstDash val="solid"/>
                     </a:lnL>
                     <a:lnR w="9525" cap="flat" cmpd="sng" algn="ctr">
                       <a:solidFill>
-                        <a:srgbClr val="26C5BD"/>
+                        <a:srgbClr val="7BEAB3"/>
                       </a:solidFill>
                       <a:prstDash val="solid"/>
                     </a:lnR>
                     <a:lnT w="9525" cap="flat" cmpd="sng" algn="ctr">
                       <a:solidFill>
-                        <a:srgbClr val="26C5BD"/>
+                        <a:srgbClr val="7BEAB3"/>
                       </a:solidFill>
                       <a:prstDash val="solid"/>
                     </a:lnT>
                     <a:lnB w="9525" cap="flat" cmpd="sng" algn="ctr">
                       <a:solidFill>
-                        <a:srgbClr val="26C5BD"/>
+                        <a:srgbClr val="7BEAB3"/>
                       </a:solidFill>
                       <a:prstDash val="solid"/>
                     </a:lnB>
                     <a:solidFill>
-                      <a:srgbClr val="26C5BD"/>
+                      <a:srgbClr val="7BEAB3"/>
                     </a:solidFill>
                   </a:tcPr>
                 </a:tc>
@@ -5285,7 +5494,7 @@
                       <a:r>
                         <a:rPr sz="1600" b="1">
                           <a:solidFill>
-                            <a:srgbClr val="FFFFFF"/>
+                            <a:srgbClr val="26231F"/>
                           </a:solidFill>
                         </a:rPr>
                         <a:t>3개월</a:t>
@@ -5295,30 +5504,30 @@
                   <a:tcPr anchor="ctr" marL="73152" marR="73152">
                     <a:lnL w="9525" cap="flat" cmpd="sng" algn="ctr">
                       <a:solidFill>
-                        <a:srgbClr val="26C5BD"/>
+                        <a:srgbClr val="7BEAB3"/>
                       </a:solidFill>
                       <a:prstDash val="solid"/>
                     </a:lnL>
                     <a:lnR w="9525" cap="flat" cmpd="sng" algn="ctr">
                       <a:solidFill>
-                        <a:srgbClr val="26C5BD"/>
+                        <a:srgbClr val="7BEAB3"/>
                       </a:solidFill>
                       <a:prstDash val="solid"/>
                     </a:lnR>
                     <a:lnT w="9525" cap="flat" cmpd="sng" algn="ctr">
                       <a:solidFill>
-                        <a:srgbClr val="26C5BD"/>
+                        <a:srgbClr val="7BEAB3"/>
                       </a:solidFill>
                       <a:prstDash val="solid"/>
                     </a:lnT>
                     <a:lnB w="9525" cap="flat" cmpd="sng" algn="ctr">
                       <a:solidFill>
-                        <a:srgbClr val="26C5BD"/>
+                        <a:srgbClr val="7BEAB3"/>
                       </a:solidFill>
                       <a:prstDash val="solid"/>
                     </a:lnB>
                     <a:solidFill>
-                      <a:srgbClr val="26C5BD"/>
+                      <a:srgbClr val="7BEAB3"/>
                     </a:solidFill>
                   </a:tcPr>
                 </a:tc>
@@ -5331,7 +5540,7 @@
                       <a:r>
                         <a:rPr sz="1600" b="1">
                           <a:solidFill>
-                            <a:srgbClr val="FFFFFF"/>
+                            <a:srgbClr val="26231F"/>
                           </a:solidFill>
                         </a:rPr>
                         <a:t>6개월</a:t>
@@ -5341,30 +5550,30 @@
                   <a:tcPr anchor="ctr" marL="73152" marR="73152">
                     <a:lnL w="9525" cap="flat" cmpd="sng" algn="ctr">
                       <a:solidFill>
-                        <a:srgbClr val="26C5BD"/>
+                        <a:srgbClr val="7BEAB3"/>
                       </a:solidFill>
                       <a:prstDash val="solid"/>
                     </a:lnL>
                     <a:lnR w="9525" cap="flat" cmpd="sng" algn="ctr">
                       <a:solidFill>
-                        <a:srgbClr val="26C5BD"/>
+                        <a:srgbClr val="7BEAB3"/>
                       </a:solidFill>
                       <a:prstDash val="solid"/>
                     </a:lnR>
                     <a:lnT w="9525" cap="flat" cmpd="sng" algn="ctr">
                       <a:solidFill>
-                        <a:srgbClr val="26C5BD"/>
+                        <a:srgbClr val="7BEAB3"/>
                       </a:solidFill>
                       <a:prstDash val="solid"/>
                     </a:lnT>
                     <a:lnB w="9525" cap="flat" cmpd="sng" algn="ctr">
                       <a:solidFill>
-                        <a:srgbClr val="26C5BD"/>
+                        <a:srgbClr val="7BEAB3"/>
                       </a:solidFill>
                       <a:prstDash val="solid"/>
                     </a:lnB>
                     <a:solidFill>
-                      <a:srgbClr val="26C5BD"/>
+                      <a:srgbClr val="7BEAB3"/>
                     </a:solidFill>
                   </a:tcPr>
                 </a:tc>
@@ -5377,7 +5586,7 @@
                       <a:r>
                         <a:rPr sz="1600" b="1">
                           <a:solidFill>
-                            <a:srgbClr val="FFFFFF"/>
+                            <a:srgbClr val="26231F"/>
                           </a:solidFill>
                         </a:rPr>
                         <a:t>9개월</a:t>
@@ -5387,30 +5596,30 @@
                   <a:tcPr anchor="ctr" marL="73152" marR="73152">
                     <a:lnL w="9525" cap="flat" cmpd="sng" algn="ctr">
                       <a:solidFill>
-                        <a:srgbClr val="26C5BD"/>
+                        <a:srgbClr val="7BEAB3"/>
                       </a:solidFill>
                       <a:prstDash val="solid"/>
                     </a:lnL>
                     <a:lnR w="9525" cap="flat" cmpd="sng" algn="ctr">
                       <a:solidFill>
-                        <a:srgbClr val="26C5BD"/>
+                        <a:srgbClr val="7BEAB3"/>
                       </a:solidFill>
                       <a:prstDash val="solid"/>
                     </a:lnR>
                     <a:lnT w="9525" cap="flat" cmpd="sng" algn="ctr">
                       <a:solidFill>
-                        <a:srgbClr val="26C5BD"/>
+                        <a:srgbClr val="7BEAB3"/>
                       </a:solidFill>
                       <a:prstDash val="solid"/>
                     </a:lnT>
                     <a:lnB w="9525" cap="flat" cmpd="sng" algn="ctr">
                       <a:solidFill>
-                        <a:srgbClr val="26C5BD"/>
+                        <a:srgbClr val="7BEAB3"/>
                       </a:solidFill>
                       <a:prstDash val="solid"/>
                     </a:lnB>
                     <a:solidFill>
-                      <a:srgbClr val="26C5BD"/>
+                      <a:srgbClr val="7BEAB3"/>
                     </a:solidFill>
                   </a:tcPr>
                 </a:tc>
@@ -5423,7 +5632,7 @@
                       <a:r>
                         <a:rPr sz="1600" b="1">
                           <a:solidFill>
-                            <a:srgbClr val="FFFFFF"/>
+                            <a:srgbClr val="26231F"/>
                           </a:solidFill>
                         </a:rPr>
                         <a:t>12개월</a:t>
@@ -5433,30 +5642,30 @@
                   <a:tcPr anchor="ctr" marL="73152" marR="73152">
                     <a:lnL w="9525" cap="flat" cmpd="sng" algn="ctr">
                       <a:solidFill>
-                        <a:srgbClr val="26C5BD"/>
+                        <a:srgbClr val="7BEAB3"/>
                       </a:solidFill>
                       <a:prstDash val="solid"/>
                     </a:lnL>
                     <a:lnR w="9525" cap="flat" cmpd="sng" algn="ctr">
                       <a:solidFill>
-                        <a:srgbClr val="26C5BD"/>
+                        <a:srgbClr val="7BEAB3"/>
                       </a:solidFill>
                       <a:prstDash val="solid"/>
                     </a:lnR>
                     <a:lnT w="9525" cap="flat" cmpd="sng" algn="ctr">
                       <a:solidFill>
-                        <a:srgbClr val="26C5BD"/>
+                        <a:srgbClr val="7BEAB3"/>
                       </a:solidFill>
                       <a:prstDash val="solid"/>
                     </a:lnT>
                     <a:lnB w="9525" cap="flat" cmpd="sng" algn="ctr">
                       <a:solidFill>
-                        <a:srgbClr val="26C5BD"/>
+                        <a:srgbClr val="7BEAB3"/>
                       </a:solidFill>
                       <a:prstDash val="solid"/>
                     </a:lnB>
                     <a:solidFill>
-                      <a:srgbClr val="26C5BD"/>
+                      <a:srgbClr val="7BEAB3"/>
                     </a:solidFill>
                   </a:tcPr>
                 </a:tc>
@@ -5471,7 +5680,7 @@
                       <a:r>
                         <a:rPr sz="1600" b="1">
                           <a:solidFill>
-                            <a:srgbClr val="115F5B"/>
+                            <a:srgbClr val="274938"/>
                           </a:solidFill>
                         </a:rPr>
                         <a:t>키(cm)</a:t>
@@ -5481,30 +5690,30 @@
                   <a:tcPr anchor="ctr" marL="73152" marR="73152">
                     <a:lnL w="9525" cap="flat" cmpd="sng" algn="ctr">
                       <a:solidFill>
-                        <a:srgbClr val="D1FAF8"/>
+                        <a:srgbClr val="D1FAE6"/>
                       </a:solidFill>
                       <a:prstDash val="solid"/>
                     </a:lnL>
                     <a:lnR w="9525" cap="flat" cmpd="sng" algn="ctr">
                       <a:solidFill>
-                        <a:srgbClr val="D1FAF8"/>
+                        <a:srgbClr val="D1FAE6"/>
                       </a:solidFill>
                       <a:prstDash val="solid"/>
                     </a:lnR>
                     <a:lnT w="9525" cap="flat" cmpd="sng" algn="ctr">
                       <a:solidFill>
-                        <a:srgbClr val="D1FAF8"/>
+                        <a:srgbClr val="D1FAE6"/>
                       </a:solidFill>
                       <a:prstDash val="solid"/>
                     </a:lnT>
                     <a:lnB w="9525" cap="flat" cmpd="sng" algn="ctr">
                       <a:solidFill>
-                        <a:srgbClr val="D1FAF8"/>
+                        <a:srgbClr val="D1FAE6"/>
                       </a:solidFill>
                       <a:prstDash val="solid"/>
                     </a:lnB>
                     <a:solidFill>
-                      <a:srgbClr val="D1FAF8"/>
+                      <a:srgbClr val="D1FAE6"/>
                     </a:solidFill>
                   </a:tcPr>
                 </a:tc>
@@ -5517,7 +5726,7 @@
                       <a:r>
                         <a:rPr sz="1600" b="0">
                           <a:solidFill>
-                            <a:srgbClr val="2B2B2B"/>
+                            <a:srgbClr val="26231F"/>
                           </a:solidFill>
                         </a:rPr>
                         <a:t/>
@@ -5527,25 +5736,25 @@
                   <a:tcPr anchor="ctr" marL="73152" marR="73152">
                     <a:lnL w="9525" cap="flat" cmpd="sng" algn="ctr">
                       <a:solidFill>
-                        <a:srgbClr val="D1FAF8"/>
+                        <a:srgbClr val="D1FAE6"/>
                       </a:solidFill>
                       <a:prstDash val="solid"/>
                     </a:lnL>
                     <a:lnR w="9525" cap="flat" cmpd="sng" algn="ctr">
                       <a:solidFill>
-                        <a:srgbClr val="D1FAF8"/>
+                        <a:srgbClr val="D1FAE6"/>
                       </a:solidFill>
                       <a:prstDash val="solid"/>
                     </a:lnR>
                     <a:lnT w="9525" cap="flat" cmpd="sng" algn="ctr">
                       <a:solidFill>
-                        <a:srgbClr val="D1FAF8"/>
+                        <a:srgbClr val="D1FAE6"/>
                       </a:solidFill>
                       <a:prstDash val="solid"/>
                     </a:lnT>
                     <a:lnB w="9525" cap="flat" cmpd="sng" algn="ctr">
                       <a:solidFill>
-                        <a:srgbClr val="D1FAF8"/>
+                        <a:srgbClr val="D1FAE6"/>
                       </a:solidFill>
                       <a:prstDash val="solid"/>
                     </a:lnB>
@@ -5563,7 +5772,7 @@
                       <a:r>
                         <a:rPr sz="1600" b="0">
                           <a:solidFill>
-                            <a:srgbClr val="2B2B2B"/>
+                            <a:srgbClr val="26231F"/>
                           </a:solidFill>
                         </a:rPr>
                         <a:t/>
@@ -5573,25 +5782,25 @@
                   <a:tcPr anchor="ctr" marL="73152" marR="73152">
                     <a:lnL w="9525" cap="flat" cmpd="sng" algn="ctr">
                       <a:solidFill>
-                        <a:srgbClr val="D1FAF8"/>
+                        <a:srgbClr val="D1FAE6"/>
                       </a:solidFill>
                       <a:prstDash val="solid"/>
                     </a:lnL>
                     <a:lnR w="9525" cap="flat" cmpd="sng" algn="ctr">
                       <a:solidFill>
-                        <a:srgbClr val="D1FAF8"/>
+                        <a:srgbClr val="D1FAE6"/>
                       </a:solidFill>
                       <a:prstDash val="solid"/>
                     </a:lnR>
                     <a:lnT w="9525" cap="flat" cmpd="sng" algn="ctr">
                       <a:solidFill>
-                        <a:srgbClr val="D1FAF8"/>
+                        <a:srgbClr val="D1FAE6"/>
                       </a:solidFill>
                       <a:prstDash val="solid"/>
                     </a:lnT>
                     <a:lnB w="9525" cap="flat" cmpd="sng" algn="ctr">
                       <a:solidFill>
-                        <a:srgbClr val="D1FAF8"/>
+                        <a:srgbClr val="D1FAE6"/>
                       </a:solidFill>
                       <a:prstDash val="solid"/>
                     </a:lnB>
@@ -5609,7 +5818,7 @@
                       <a:r>
                         <a:rPr sz="1600" b="0">
                           <a:solidFill>
-                            <a:srgbClr val="2B2B2B"/>
+                            <a:srgbClr val="26231F"/>
                           </a:solidFill>
                         </a:rPr>
                         <a:t/>
@@ -5619,25 +5828,25 @@
                   <a:tcPr anchor="ctr" marL="73152" marR="73152">
                     <a:lnL w="9525" cap="flat" cmpd="sng" algn="ctr">
                       <a:solidFill>
-                        <a:srgbClr val="D1FAF8"/>
+                        <a:srgbClr val="D1FAE6"/>
                       </a:solidFill>
                       <a:prstDash val="solid"/>
                     </a:lnL>
                     <a:lnR w="9525" cap="flat" cmpd="sng" algn="ctr">
                       <a:solidFill>
-                        <a:srgbClr val="D1FAF8"/>
+                        <a:srgbClr val="D1FAE6"/>
                       </a:solidFill>
                       <a:prstDash val="solid"/>
                     </a:lnR>
                     <a:lnT w="9525" cap="flat" cmpd="sng" algn="ctr">
                       <a:solidFill>
-                        <a:srgbClr val="D1FAF8"/>
+                        <a:srgbClr val="D1FAE6"/>
                       </a:solidFill>
                       <a:prstDash val="solid"/>
                     </a:lnT>
                     <a:lnB w="9525" cap="flat" cmpd="sng" algn="ctr">
                       <a:solidFill>
-                        <a:srgbClr val="D1FAF8"/>
+                        <a:srgbClr val="D1FAE6"/>
                       </a:solidFill>
                       <a:prstDash val="solid"/>
                     </a:lnB>
@@ -5655,7 +5864,7 @@
                       <a:r>
                         <a:rPr sz="1600" b="0">
                           <a:solidFill>
-                            <a:srgbClr val="2B2B2B"/>
+                            <a:srgbClr val="26231F"/>
                           </a:solidFill>
                         </a:rPr>
                         <a:t/>
@@ -5665,25 +5874,25 @@
                   <a:tcPr anchor="ctr" marL="73152" marR="73152">
                     <a:lnL w="9525" cap="flat" cmpd="sng" algn="ctr">
                       <a:solidFill>
-                        <a:srgbClr val="D1FAF8"/>
+                        <a:srgbClr val="D1FAE6"/>
                       </a:solidFill>
                       <a:prstDash val="solid"/>
                     </a:lnL>
                     <a:lnR w="9525" cap="flat" cmpd="sng" algn="ctr">
                       <a:solidFill>
-                        <a:srgbClr val="D1FAF8"/>
+                        <a:srgbClr val="D1FAE6"/>
                       </a:solidFill>
                       <a:prstDash val="solid"/>
                     </a:lnR>
                     <a:lnT w="9525" cap="flat" cmpd="sng" algn="ctr">
                       <a:solidFill>
-                        <a:srgbClr val="D1FAF8"/>
+                        <a:srgbClr val="D1FAE6"/>
                       </a:solidFill>
                       <a:prstDash val="solid"/>
                     </a:lnT>
                     <a:lnB w="9525" cap="flat" cmpd="sng" algn="ctr">
                       <a:solidFill>
-                        <a:srgbClr val="D1FAF8"/>
+                        <a:srgbClr val="D1FAE6"/>
                       </a:solidFill>
                       <a:prstDash val="solid"/>
                     </a:lnB>
@@ -5703,7 +5912,7 @@
                       <a:r>
                         <a:rPr sz="1600" b="1">
                           <a:solidFill>
-                            <a:srgbClr val="115F5B"/>
+                            <a:srgbClr val="274938"/>
                           </a:solidFill>
                         </a:rPr>
                         <a:t>몸무게(kg)</a:t>
@@ -5713,30 +5922,30 @@
                   <a:tcPr anchor="ctr" marL="73152" marR="73152">
                     <a:lnL w="9525" cap="flat" cmpd="sng" algn="ctr">
                       <a:solidFill>
-                        <a:srgbClr val="D1FAF8"/>
+                        <a:srgbClr val="D1FAE6"/>
                       </a:solidFill>
                       <a:prstDash val="solid"/>
                     </a:lnL>
                     <a:lnR w="9525" cap="flat" cmpd="sng" algn="ctr">
                       <a:solidFill>
-                        <a:srgbClr val="D1FAF8"/>
+                        <a:srgbClr val="D1FAE6"/>
                       </a:solidFill>
                       <a:prstDash val="solid"/>
                     </a:lnR>
                     <a:lnT w="9525" cap="flat" cmpd="sng" algn="ctr">
                       <a:solidFill>
-                        <a:srgbClr val="D1FAF8"/>
+                        <a:srgbClr val="D1FAE6"/>
                       </a:solidFill>
                       <a:prstDash val="solid"/>
                     </a:lnT>
                     <a:lnB w="9525" cap="flat" cmpd="sng" algn="ctr">
                       <a:solidFill>
-                        <a:srgbClr val="D1FAF8"/>
+                        <a:srgbClr val="D1FAE6"/>
                       </a:solidFill>
                       <a:prstDash val="solid"/>
                     </a:lnB>
                     <a:solidFill>
-                      <a:srgbClr val="D1FAF8"/>
+                      <a:srgbClr val="D1FAE6"/>
                     </a:solidFill>
                   </a:tcPr>
                 </a:tc>
@@ -5749,7 +5958,7 @@
                       <a:r>
                         <a:rPr sz="1600" b="0">
                           <a:solidFill>
-                            <a:srgbClr val="2B2B2B"/>
+                            <a:srgbClr val="26231F"/>
                           </a:solidFill>
                         </a:rPr>
                         <a:t/>
@@ -5759,30 +5968,30 @@
                   <a:tcPr anchor="ctr" marL="73152" marR="73152">
                     <a:lnL w="9525" cap="flat" cmpd="sng" algn="ctr">
                       <a:solidFill>
-                        <a:srgbClr val="D1FAF8"/>
+                        <a:srgbClr val="D1FAE6"/>
                       </a:solidFill>
                       <a:prstDash val="solid"/>
                     </a:lnL>
                     <a:lnR w="9525" cap="flat" cmpd="sng" algn="ctr">
                       <a:solidFill>
-                        <a:srgbClr val="D1FAF8"/>
+                        <a:srgbClr val="D1FAE6"/>
                       </a:solidFill>
                       <a:prstDash val="solid"/>
                     </a:lnR>
                     <a:lnT w="9525" cap="flat" cmpd="sng" algn="ctr">
                       <a:solidFill>
-                        <a:srgbClr val="D1FAF8"/>
+                        <a:srgbClr val="D1FAE6"/>
                       </a:solidFill>
                       <a:prstDash val="solid"/>
                     </a:lnT>
                     <a:lnB w="9525" cap="flat" cmpd="sng" algn="ctr">
                       <a:solidFill>
-                        <a:srgbClr val="D1FAF8"/>
+                        <a:srgbClr val="D1FAE6"/>
                       </a:solidFill>
                       <a:prstDash val="solid"/>
                     </a:lnB>
                     <a:solidFill>
-                      <a:srgbClr val="EEFCFB"/>
+                      <a:srgbClr val="EAFDF4"/>
                     </a:solidFill>
                   </a:tcPr>
                 </a:tc>
@@ -5795,7 +6004,7 @@
                       <a:r>
                         <a:rPr sz="1600" b="0">
                           <a:solidFill>
-                            <a:srgbClr val="2B2B2B"/>
+                            <a:srgbClr val="26231F"/>
                           </a:solidFill>
                         </a:rPr>
                         <a:t/>
@@ -5805,30 +6014,30 @@
                   <a:tcPr anchor="ctr" marL="73152" marR="73152">
                     <a:lnL w="9525" cap="flat" cmpd="sng" algn="ctr">
                       <a:solidFill>
-                        <a:srgbClr val="D1FAF8"/>
+                        <a:srgbClr val="D1FAE6"/>
                       </a:solidFill>
                       <a:prstDash val="solid"/>
                     </a:lnL>
                     <a:lnR w="9525" cap="flat" cmpd="sng" algn="ctr">
                       <a:solidFill>
-                        <a:srgbClr val="D1FAF8"/>
+                        <a:srgbClr val="D1FAE6"/>
                       </a:solidFill>
                       <a:prstDash val="solid"/>
                     </a:lnR>
                     <a:lnT w="9525" cap="flat" cmpd="sng" algn="ctr">
                       <a:solidFill>
-                        <a:srgbClr val="D1FAF8"/>
+                        <a:srgbClr val="D1FAE6"/>
                       </a:solidFill>
                       <a:prstDash val="solid"/>
                     </a:lnT>
                     <a:lnB w="9525" cap="flat" cmpd="sng" algn="ctr">
                       <a:solidFill>
-                        <a:srgbClr val="D1FAF8"/>
+                        <a:srgbClr val="D1FAE6"/>
                       </a:solidFill>
                       <a:prstDash val="solid"/>
                     </a:lnB>
                     <a:solidFill>
-                      <a:srgbClr val="EEFCFB"/>
+                      <a:srgbClr val="EAFDF4"/>
                     </a:solidFill>
                   </a:tcPr>
                 </a:tc>
@@ -5841,7 +6050,7 @@
                       <a:r>
                         <a:rPr sz="1600" b="0">
                           <a:solidFill>
-                            <a:srgbClr val="2B2B2B"/>
+                            <a:srgbClr val="26231F"/>
                           </a:solidFill>
                         </a:rPr>
                         <a:t/>
@@ -5851,30 +6060,30 @@
                   <a:tcPr anchor="ctr" marL="73152" marR="73152">
                     <a:lnL w="9525" cap="flat" cmpd="sng" algn="ctr">
                       <a:solidFill>
-                        <a:srgbClr val="D1FAF8"/>
+                        <a:srgbClr val="D1FAE6"/>
                       </a:solidFill>
                       <a:prstDash val="solid"/>
                     </a:lnL>
                     <a:lnR w="9525" cap="flat" cmpd="sng" algn="ctr">
                       <a:solidFill>
-                        <a:srgbClr val="D1FAF8"/>
+                        <a:srgbClr val="D1FAE6"/>
                       </a:solidFill>
                       <a:prstDash val="solid"/>
                     </a:lnR>
                     <a:lnT w="9525" cap="flat" cmpd="sng" algn="ctr">
                       <a:solidFill>
-                        <a:srgbClr val="D1FAF8"/>
+                        <a:srgbClr val="D1FAE6"/>
                       </a:solidFill>
                       <a:prstDash val="solid"/>
                     </a:lnT>
                     <a:lnB w="9525" cap="flat" cmpd="sng" algn="ctr">
                       <a:solidFill>
-                        <a:srgbClr val="D1FAF8"/>
+                        <a:srgbClr val="D1FAE6"/>
                       </a:solidFill>
                       <a:prstDash val="solid"/>
                     </a:lnB>
                     <a:solidFill>
-                      <a:srgbClr val="EEFCFB"/>
+                      <a:srgbClr val="EAFDF4"/>
                     </a:solidFill>
                   </a:tcPr>
                 </a:tc>
@@ -5887,7 +6096,7 @@
                       <a:r>
                         <a:rPr sz="1600" b="0">
                           <a:solidFill>
-                            <a:srgbClr val="2B2B2B"/>
+                            <a:srgbClr val="26231F"/>
                           </a:solidFill>
                         </a:rPr>
                         <a:t/>
@@ -5897,30 +6106,30 @@
                   <a:tcPr anchor="ctr" marL="73152" marR="73152">
                     <a:lnL w="9525" cap="flat" cmpd="sng" algn="ctr">
                       <a:solidFill>
-                        <a:srgbClr val="D1FAF8"/>
+                        <a:srgbClr val="D1FAE6"/>
                       </a:solidFill>
                       <a:prstDash val="solid"/>
                     </a:lnL>
                     <a:lnR w="9525" cap="flat" cmpd="sng" algn="ctr">
                       <a:solidFill>
-                        <a:srgbClr val="D1FAF8"/>
+                        <a:srgbClr val="D1FAE6"/>
                       </a:solidFill>
                       <a:prstDash val="solid"/>
                     </a:lnR>
                     <a:lnT w="9525" cap="flat" cmpd="sng" algn="ctr">
                       <a:solidFill>
-                        <a:srgbClr val="D1FAF8"/>
+                        <a:srgbClr val="D1FAE6"/>
                       </a:solidFill>
                       <a:prstDash val="solid"/>
                     </a:lnT>
                     <a:lnB w="9525" cap="flat" cmpd="sng" algn="ctr">
                       <a:solidFill>
-                        <a:srgbClr val="D1FAF8"/>
+                        <a:srgbClr val="D1FAE6"/>
                       </a:solidFill>
                       <a:prstDash val="solid"/>
                     </a:lnB>
                     <a:solidFill>
-                      <a:srgbClr val="EEFCFB"/>
+                      <a:srgbClr val="EAFDF4"/>
                     </a:solidFill>
                   </a:tcPr>
                 </a:tc>
@@ -5935,7 +6144,7 @@
                       <a:r>
                         <a:rPr sz="1600" b="1">
                           <a:solidFill>
-                            <a:srgbClr val="115F5B"/>
+                            <a:srgbClr val="274938"/>
                           </a:solidFill>
                         </a:rPr>
                         <a:t>새로 한 것</a:t>
@@ -5945,30 +6154,30 @@
                   <a:tcPr anchor="ctr" marL="73152" marR="73152">
                     <a:lnL w="9525" cap="flat" cmpd="sng" algn="ctr">
                       <a:solidFill>
-                        <a:srgbClr val="D1FAF8"/>
+                        <a:srgbClr val="D1FAE6"/>
                       </a:solidFill>
                       <a:prstDash val="solid"/>
                     </a:lnL>
                     <a:lnR w="9525" cap="flat" cmpd="sng" algn="ctr">
                       <a:solidFill>
-                        <a:srgbClr val="D1FAF8"/>
+                        <a:srgbClr val="D1FAE6"/>
                       </a:solidFill>
                       <a:prstDash val="solid"/>
                     </a:lnR>
                     <a:lnT w="9525" cap="flat" cmpd="sng" algn="ctr">
                       <a:solidFill>
-                        <a:srgbClr val="D1FAF8"/>
+                        <a:srgbClr val="D1FAE6"/>
                       </a:solidFill>
                       <a:prstDash val="solid"/>
                     </a:lnT>
                     <a:lnB w="9525" cap="flat" cmpd="sng" algn="ctr">
                       <a:solidFill>
-                        <a:srgbClr val="D1FAF8"/>
+                        <a:srgbClr val="D1FAE6"/>
                       </a:solidFill>
                       <a:prstDash val="solid"/>
                     </a:lnB>
                     <a:solidFill>
-                      <a:srgbClr val="D1FAF8"/>
+                      <a:srgbClr val="D1FAE6"/>
                     </a:solidFill>
                   </a:tcPr>
                 </a:tc>
@@ -5981,7 +6190,7 @@
                       <a:r>
                         <a:rPr sz="1600" b="0">
                           <a:solidFill>
-                            <a:srgbClr val="2B2B2B"/>
+                            <a:srgbClr val="26231F"/>
                           </a:solidFill>
                         </a:rPr>
                         <a:t/>
@@ -5991,25 +6200,25 @@
                   <a:tcPr anchor="ctr" marL="73152" marR="73152">
                     <a:lnL w="9525" cap="flat" cmpd="sng" algn="ctr">
                       <a:solidFill>
-                        <a:srgbClr val="D1FAF8"/>
+                        <a:srgbClr val="D1FAE6"/>
                       </a:solidFill>
                       <a:prstDash val="solid"/>
                     </a:lnL>
                     <a:lnR w="9525" cap="flat" cmpd="sng" algn="ctr">
                       <a:solidFill>
-                        <a:srgbClr val="D1FAF8"/>
+                        <a:srgbClr val="D1FAE6"/>
                       </a:solidFill>
                       <a:prstDash val="solid"/>
                     </a:lnR>
                     <a:lnT w="9525" cap="flat" cmpd="sng" algn="ctr">
                       <a:solidFill>
-                        <a:srgbClr val="D1FAF8"/>
+                        <a:srgbClr val="D1FAE6"/>
                       </a:solidFill>
                       <a:prstDash val="solid"/>
                     </a:lnT>
                     <a:lnB w="9525" cap="flat" cmpd="sng" algn="ctr">
                       <a:solidFill>
-                        <a:srgbClr val="D1FAF8"/>
+                        <a:srgbClr val="D1FAE6"/>
                       </a:solidFill>
                       <a:prstDash val="solid"/>
                     </a:lnB>
@@ -6027,7 +6236,7 @@
                       <a:r>
                         <a:rPr sz="1600" b="0">
                           <a:solidFill>
-                            <a:srgbClr val="2B2B2B"/>
+                            <a:srgbClr val="26231F"/>
                           </a:solidFill>
                         </a:rPr>
                         <a:t/>
@@ -6037,25 +6246,25 @@
                   <a:tcPr anchor="ctr" marL="73152" marR="73152">
                     <a:lnL w="9525" cap="flat" cmpd="sng" algn="ctr">
                       <a:solidFill>
-                        <a:srgbClr val="D1FAF8"/>
+                        <a:srgbClr val="D1FAE6"/>
                       </a:solidFill>
                       <a:prstDash val="solid"/>
                     </a:lnL>
                     <a:lnR w="9525" cap="flat" cmpd="sng" algn="ctr">
                       <a:solidFill>
-                        <a:srgbClr val="D1FAF8"/>
+                        <a:srgbClr val="D1FAE6"/>
                       </a:solidFill>
                       <a:prstDash val="solid"/>
                     </a:lnR>
                     <a:lnT w="9525" cap="flat" cmpd="sng" algn="ctr">
                       <a:solidFill>
-                        <a:srgbClr val="D1FAF8"/>
+                        <a:srgbClr val="D1FAE6"/>
                       </a:solidFill>
                       <a:prstDash val="solid"/>
                     </a:lnT>
                     <a:lnB w="9525" cap="flat" cmpd="sng" algn="ctr">
                       <a:solidFill>
-                        <a:srgbClr val="D1FAF8"/>
+                        <a:srgbClr val="D1FAE6"/>
                       </a:solidFill>
                       <a:prstDash val="solid"/>
                     </a:lnB>
@@ -6073,7 +6282,7 @@
                       <a:r>
                         <a:rPr sz="1600" b="0">
                           <a:solidFill>
-                            <a:srgbClr val="2B2B2B"/>
+                            <a:srgbClr val="26231F"/>
                           </a:solidFill>
                         </a:rPr>
                         <a:t/>
@@ -6083,25 +6292,25 @@
                   <a:tcPr anchor="ctr" marL="73152" marR="73152">
                     <a:lnL w="9525" cap="flat" cmpd="sng" algn="ctr">
                       <a:solidFill>
-                        <a:srgbClr val="D1FAF8"/>
+                        <a:srgbClr val="D1FAE6"/>
                       </a:solidFill>
                       <a:prstDash val="solid"/>
                     </a:lnL>
                     <a:lnR w="9525" cap="flat" cmpd="sng" algn="ctr">
                       <a:solidFill>
-                        <a:srgbClr val="D1FAF8"/>
+                        <a:srgbClr val="D1FAE6"/>
                       </a:solidFill>
                       <a:prstDash val="solid"/>
                     </a:lnR>
                     <a:lnT w="9525" cap="flat" cmpd="sng" algn="ctr">
                       <a:solidFill>
-                        <a:srgbClr val="D1FAF8"/>
+                        <a:srgbClr val="D1FAE6"/>
                       </a:solidFill>
                       <a:prstDash val="solid"/>
                     </a:lnT>
                     <a:lnB w="9525" cap="flat" cmpd="sng" algn="ctr">
                       <a:solidFill>
-                        <a:srgbClr val="D1FAF8"/>
+                        <a:srgbClr val="D1FAE6"/>
                       </a:solidFill>
                       <a:prstDash val="solid"/>
                     </a:lnB>
@@ -6119,7 +6328,7 @@
                       <a:r>
                         <a:rPr sz="1600" b="0">
                           <a:solidFill>
-                            <a:srgbClr val="2B2B2B"/>
+                            <a:srgbClr val="26231F"/>
                           </a:solidFill>
                         </a:rPr>
                         <a:t/>
@@ -6129,25 +6338,25 @@
                   <a:tcPr anchor="ctr" marL="73152" marR="73152">
                     <a:lnL w="9525" cap="flat" cmpd="sng" algn="ctr">
                       <a:solidFill>
-                        <a:srgbClr val="D1FAF8"/>
+                        <a:srgbClr val="D1FAE6"/>
                       </a:solidFill>
                       <a:prstDash val="solid"/>
                     </a:lnL>
                     <a:lnR w="9525" cap="flat" cmpd="sng" algn="ctr">
                       <a:solidFill>
-                        <a:srgbClr val="D1FAF8"/>
+                        <a:srgbClr val="D1FAE6"/>
                       </a:solidFill>
                       <a:prstDash val="solid"/>
                     </a:lnR>
                     <a:lnT w="9525" cap="flat" cmpd="sng" algn="ctr">
                       <a:solidFill>
-                        <a:srgbClr val="D1FAF8"/>
+                        <a:srgbClr val="D1FAE6"/>
                       </a:solidFill>
                       <a:prstDash val="solid"/>
                     </a:lnT>
                     <a:lnB w="9525" cap="flat" cmpd="sng" algn="ctr">
                       <a:solidFill>
-                        <a:srgbClr val="D1FAF8"/>
+                        <a:srgbClr val="D1FAE6"/>
                       </a:solidFill>
                       <a:prstDash val="solid"/>
                     </a:lnB>
@@ -6175,7 +6384,7 @@
     <p:bg>
       <p:bgPr>
         <a:solidFill>
-          <a:srgbClr val="FFFFFF"/>
+          <a:srgbClr val="EAFDF4"/>
         </a:solidFill>
         <a:effectLst/>
       </p:bgPr>
@@ -6195,43 +6404,81 @@
         </p:nvSpPr>
         <p:spPr>
           <a:xfrm>
-            <a:off x="-182880" y="6144768"/>
-            <a:ext cx="12557455" cy="731520"/>
+            <a:off x="640080" y="566928"/>
+            <a:ext cx="10911535" cy="10972"/>
+          </a:xfrm>
+          <a:prstGeom prst="rect">
+            <a:avLst/>
+          </a:prstGeom>
+          <a:solidFill>
+            <a:srgbClr val="26231F"/>
+          </a:solidFill>
+          <a:ln>
+            <a:noFill/>
+          </a:ln>
+        </p:spPr>
+        <p:txBody>
+          <a:bodyPr rtlCol="0" anchor="ctr"/>
+          <a:lstStyle/>
+          <a:p>
+            <a:pPr algn="ctr"/>
+          </a:p>
+        </p:txBody>
+      </p:sp>
+      <p:sp>
+        <p:nvSpPr>
+          <p:cNvPr id="4" name="상단 라벨"/>
+          <p:cNvSpPr txBox="1"/>
+          <p:nvPr/>
+        </p:nvSpPr>
+        <p:spPr>
+          <a:xfrm>
+            <a:off x="640080" y="237744"/>
+            <a:ext cx="5486400" cy="274320"/>
+          </a:xfrm>
+          <a:prstGeom prst="rect">
+            <a:avLst/>
+          </a:prstGeom>
+          <a:noFill/>
+        </p:spPr>
+        <p:txBody>
+          <a:bodyPr wrap="square" lIns="54864" rIns="54864" tIns="27432" bIns="27432" anchor="ctr">
+            <a:noAutofit/>
+          </a:bodyPr>
+          <a:lstStyle/>
+          <a:p>
+            <a:pPr algn="l">
+              <a:lnSpc>
+                <a:spcPct val="115000"/>
+              </a:lnSpc>
+            </a:pPr>
+            <a:r>
+              <a:rPr sz="900" b="1" i="0" spc="250">
+                <a:solidFill>
+                  <a:srgbClr val="26231F"/>
+                </a:solidFill>
+              </a:rPr>
+              <a:t>FIRST BIRTHDAY</a:t>
+            </a:r>
+          </a:p>
+        </p:txBody>
+      </p:sp>
+      <p:sp>
+        <p:nvSpPr>
+          <p:cNvPr id="5" name="포인트"/>
+          <p:cNvSpPr/>
+          <p:nvPr/>
+        </p:nvSpPr>
+        <p:spPr>
+          <a:xfrm>
+            <a:off x="11204143" y="246888"/>
+            <a:ext cx="237744" cy="95097"/>
           </a:xfrm>
           <a:prstGeom prst="wave">
             <a:avLst/>
           </a:prstGeom>
           <a:solidFill>
-            <a:srgbClr val="D1FAF8"/>
-          </a:solidFill>
-          <a:ln>
-            <a:noFill/>
-          </a:ln>
-        </p:spPr>
-        <p:txBody>
-          <a:bodyPr rtlCol="0" anchor="ctr"/>
-          <a:lstStyle/>
-          <a:p>
-            <a:pPr algn="ctr"/>
-          </a:p>
-        </p:txBody>
-      </p:sp>
-      <p:sp>
-        <p:nvSpPr>
-          <p:cNvPr id="4" name="장식"/>
-          <p:cNvSpPr/>
-          <p:nvPr/>
-        </p:nvSpPr>
-        <p:spPr>
-          <a:xfrm>
-            <a:off x="-182880" y="6400800"/>
-            <a:ext cx="12557455" cy="502920"/>
-          </a:xfrm>
-          <a:prstGeom prst="wave">
-            <a:avLst/>
-          </a:prstGeom>
-          <a:solidFill>
-            <a:srgbClr val="26C5BD"/>
+            <a:srgbClr val="7BEAB3"/>
           </a:solidFill>
           <a:ln>
             <a:noFill/>
@@ -6257,8 +6504,8 @@
         </p:nvSpPr>
         <p:spPr>
           <a:xfrm>
-            <a:off x="640080" y="457200"/>
-            <a:ext cx="9722815" cy="868680"/>
+            <a:off x="640080" y="731520"/>
+            <a:ext cx="10911535" cy="822960"/>
           </a:xfrm>
         </p:spPr>
         <p:txBody>
@@ -6275,7 +6522,7 @@
             <a:r>
               <a:rPr sz="3000" b="1" i="0">
                 <a:solidFill>
-                  <a:srgbClr val="115F5B"/>
+                  <a:srgbClr val="26231F"/>
                 </a:solidFill>
               </a:rPr>
               <a:t>사진 모음</a:t>
@@ -6285,14 +6532,14 @@
       </p:sp>
       <p:sp>
         <p:nvSpPr>
-          <p:cNvPr id="5" name="사진 자리"/>
+          <p:cNvPr id="6" name="사진 자리"/>
           <p:cNvSpPr/>
           <p:nvPr/>
         </p:nvSpPr>
         <p:spPr>
           <a:xfrm>
-            <a:off x="640080" y="1554480"/>
-            <a:ext cx="2590723" cy="2103120"/>
+            <a:off x="640080" y="1783080"/>
+            <a:ext cx="2590723" cy="2194560"/>
           </a:xfrm>
           <a:prstGeom prst="roundRect">
             <a:avLst>
@@ -6300,12 +6547,10 @@
             </a:avLst>
           </a:prstGeom>
           <a:solidFill>
-            <a:srgbClr val="D1FAF8"/>
+            <a:srgbClr val="D1FAE6"/>
           </a:solidFill>
           <a:ln w="19050">
-            <a:solidFill>
-              <a:srgbClr val="26C5BD"/>
-            </a:solidFill>
+            <a:noFill/>
             <a:prstDash val="dash"/>
           </a:ln>
         </p:spPr>
@@ -6323,7 +6568,7 @@
             <a:r>
               <a:rPr sz="1200" b="0" i="0">
                 <a:solidFill>
-                  <a:srgbClr val="115F5B"/>
+                  <a:srgbClr val="8E8780"/>
                 </a:solidFill>
               </a:rPr>
               <a:t>사진 1</a:t>
@@ -6333,14 +6578,14 @@
       </p:sp>
       <p:sp>
         <p:nvSpPr>
-          <p:cNvPr id="6" name="사진 자리"/>
+          <p:cNvPr id="7" name="사진 자리"/>
           <p:cNvSpPr/>
           <p:nvPr/>
         </p:nvSpPr>
         <p:spPr>
           <a:xfrm>
-            <a:off x="3413683" y="1554480"/>
-            <a:ext cx="2590723" cy="2103120"/>
+            <a:off x="3413683" y="1783080"/>
+            <a:ext cx="2590723" cy="2194560"/>
           </a:xfrm>
           <a:prstGeom prst="roundRect">
             <a:avLst>
@@ -6348,12 +6593,10 @@
             </a:avLst>
           </a:prstGeom>
           <a:solidFill>
-            <a:srgbClr val="D1FAF8"/>
+            <a:srgbClr val="D1FAE6"/>
           </a:solidFill>
           <a:ln w="19050">
-            <a:solidFill>
-              <a:srgbClr val="26C5BD"/>
-            </a:solidFill>
+            <a:noFill/>
             <a:prstDash val="dash"/>
           </a:ln>
         </p:spPr>
@@ -6371,7 +6614,7 @@
             <a:r>
               <a:rPr sz="1200" b="0" i="0">
                 <a:solidFill>
-                  <a:srgbClr val="115F5B"/>
+                  <a:srgbClr val="8E8780"/>
                 </a:solidFill>
               </a:rPr>
               <a:t>사진 2</a:t>
@@ -6381,14 +6624,14 @@
       </p:sp>
       <p:sp>
         <p:nvSpPr>
-          <p:cNvPr id="7" name="사진 자리"/>
+          <p:cNvPr id="8" name="사진 자리"/>
           <p:cNvSpPr/>
           <p:nvPr/>
         </p:nvSpPr>
         <p:spPr>
           <a:xfrm>
-            <a:off x="6187287" y="1554480"/>
-            <a:ext cx="2590723" cy="2103120"/>
+            <a:off x="6187287" y="1783080"/>
+            <a:ext cx="2590723" cy="2194560"/>
           </a:xfrm>
           <a:prstGeom prst="roundRect">
             <a:avLst>
@@ -6396,12 +6639,10 @@
             </a:avLst>
           </a:prstGeom>
           <a:solidFill>
-            <a:srgbClr val="D1FAF8"/>
+            <a:srgbClr val="D1FAE6"/>
           </a:solidFill>
           <a:ln w="19050">
-            <a:solidFill>
-              <a:srgbClr val="26C5BD"/>
-            </a:solidFill>
+            <a:noFill/>
             <a:prstDash val="dash"/>
           </a:ln>
         </p:spPr>
@@ -6419,7 +6660,7 @@
             <a:r>
               <a:rPr sz="1200" b="0" i="0">
                 <a:solidFill>
-                  <a:srgbClr val="115F5B"/>
+                  <a:srgbClr val="8E8780"/>
                 </a:solidFill>
               </a:rPr>
               <a:t>사진 3</a:t>
@@ -6429,14 +6670,14 @@
       </p:sp>
       <p:sp>
         <p:nvSpPr>
-          <p:cNvPr id="8" name="사진 자리"/>
+          <p:cNvPr id="9" name="사진 자리"/>
           <p:cNvSpPr/>
           <p:nvPr/>
         </p:nvSpPr>
         <p:spPr>
           <a:xfrm>
-            <a:off x="8960891" y="1554480"/>
-            <a:ext cx="2590723" cy="2103120"/>
+            <a:off x="8960891" y="1783080"/>
+            <a:ext cx="2590723" cy="2194560"/>
           </a:xfrm>
           <a:prstGeom prst="roundRect">
             <a:avLst>
@@ -6444,12 +6685,10 @@
             </a:avLst>
           </a:prstGeom>
           <a:solidFill>
-            <a:srgbClr val="D1FAF8"/>
+            <a:srgbClr val="D1FAE6"/>
           </a:solidFill>
           <a:ln w="19050">
-            <a:solidFill>
-              <a:srgbClr val="26C5BD"/>
-            </a:solidFill>
+            <a:noFill/>
             <a:prstDash val="dash"/>
           </a:ln>
         </p:spPr>
@@ -6467,7 +6706,7 @@
             <a:r>
               <a:rPr sz="1200" b="0" i="0">
                 <a:solidFill>
-                  <a:srgbClr val="115F5B"/>
+                  <a:srgbClr val="8E8780"/>
                 </a:solidFill>
               </a:rPr>
               <a:t>사진 4</a:t>
@@ -6477,14 +6716,14 @@
       </p:sp>
       <p:sp>
         <p:nvSpPr>
-          <p:cNvPr id="9" name="사진 자리"/>
+          <p:cNvPr id="10" name="사진 자리"/>
           <p:cNvSpPr/>
           <p:nvPr/>
         </p:nvSpPr>
         <p:spPr>
           <a:xfrm>
-            <a:off x="640080" y="3840480"/>
-            <a:ext cx="2590723" cy="2103120"/>
+            <a:off x="640080" y="4160520"/>
+            <a:ext cx="2590723" cy="2194560"/>
           </a:xfrm>
           <a:prstGeom prst="roundRect">
             <a:avLst>
@@ -6492,12 +6731,10 @@
             </a:avLst>
           </a:prstGeom>
           <a:solidFill>
-            <a:srgbClr val="D1FAF8"/>
+            <a:srgbClr val="D1FAE6"/>
           </a:solidFill>
           <a:ln w="19050">
-            <a:solidFill>
-              <a:srgbClr val="26C5BD"/>
-            </a:solidFill>
+            <a:noFill/>
             <a:prstDash val="dash"/>
           </a:ln>
         </p:spPr>
@@ -6515,7 +6752,7 @@
             <a:r>
               <a:rPr sz="1200" b="0" i="0">
                 <a:solidFill>
-                  <a:srgbClr val="115F5B"/>
+                  <a:srgbClr val="8E8780"/>
                 </a:solidFill>
               </a:rPr>
               <a:t>사진 5</a:t>
@@ -6525,14 +6762,14 @@
       </p:sp>
       <p:sp>
         <p:nvSpPr>
-          <p:cNvPr id="10" name="사진 자리"/>
+          <p:cNvPr id="11" name="사진 자리"/>
           <p:cNvSpPr/>
           <p:nvPr/>
         </p:nvSpPr>
         <p:spPr>
           <a:xfrm>
-            <a:off x="3413683" y="3840480"/>
-            <a:ext cx="2590723" cy="2103120"/>
+            <a:off x="3413683" y="4160520"/>
+            <a:ext cx="2590723" cy="2194560"/>
           </a:xfrm>
           <a:prstGeom prst="roundRect">
             <a:avLst>
@@ -6540,12 +6777,10 @@
             </a:avLst>
           </a:prstGeom>
           <a:solidFill>
-            <a:srgbClr val="D1FAF8"/>
+            <a:srgbClr val="D1FAE6"/>
           </a:solidFill>
           <a:ln w="19050">
-            <a:solidFill>
-              <a:srgbClr val="26C5BD"/>
-            </a:solidFill>
+            <a:noFill/>
             <a:prstDash val="dash"/>
           </a:ln>
         </p:spPr>
@@ -6563,7 +6798,7 @@
             <a:r>
               <a:rPr sz="1200" b="0" i="0">
                 <a:solidFill>
-                  <a:srgbClr val="115F5B"/>
+                  <a:srgbClr val="8E8780"/>
                 </a:solidFill>
               </a:rPr>
               <a:t>사진 6</a:t>
@@ -6573,14 +6808,14 @@
       </p:sp>
       <p:sp>
         <p:nvSpPr>
-          <p:cNvPr id="11" name="사진 자리"/>
+          <p:cNvPr id="12" name="사진 자리"/>
           <p:cNvSpPr/>
           <p:nvPr/>
         </p:nvSpPr>
         <p:spPr>
           <a:xfrm>
-            <a:off x="6187287" y="3840480"/>
-            <a:ext cx="2590723" cy="2103120"/>
+            <a:off x="6187287" y="4160520"/>
+            <a:ext cx="2590723" cy="2194560"/>
           </a:xfrm>
           <a:prstGeom prst="roundRect">
             <a:avLst>
@@ -6588,12 +6823,10 @@
             </a:avLst>
           </a:prstGeom>
           <a:solidFill>
-            <a:srgbClr val="D1FAF8"/>
+            <a:srgbClr val="D1FAE6"/>
           </a:solidFill>
           <a:ln w="19050">
-            <a:solidFill>
-              <a:srgbClr val="26C5BD"/>
-            </a:solidFill>
+            <a:noFill/>
             <a:prstDash val="dash"/>
           </a:ln>
         </p:spPr>
@@ -6611,7 +6844,7 @@
             <a:r>
               <a:rPr sz="1200" b="0" i="0">
                 <a:solidFill>
-                  <a:srgbClr val="115F5B"/>
+                  <a:srgbClr val="8E8780"/>
                 </a:solidFill>
               </a:rPr>
               <a:t>사진 7</a:t>
@@ -6621,14 +6854,14 @@
       </p:sp>
       <p:sp>
         <p:nvSpPr>
-          <p:cNvPr id="12" name="사진 자리"/>
+          <p:cNvPr id="13" name="사진 자리"/>
           <p:cNvSpPr/>
           <p:nvPr/>
         </p:nvSpPr>
         <p:spPr>
           <a:xfrm>
-            <a:off x="8960891" y="3840480"/>
-            <a:ext cx="2590723" cy="2103120"/>
+            <a:off x="8960891" y="4160520"/>
+            <a:ext cx="2590723" cy="2194560"/>
           </a:xfrm>
           <a:prstGeom prst="roundRect">
             <a:avLst>
@@ -6636,12 +6869,10 @@
             </a:avLst>
           </a:prstGeom>
           <a:solidFill>
-            <a:srgbClr val="D1FAF8"/>
+            <a:srgbClr val="D1FAE6"/>
           </a:solidFill>
           <a:ln w="19050">
-            <a:solidFill>
-              <a:srgbClr val="26C5BD"/>
-            </a:solidFill>
+            <a:noFill/>
             <a:prstDash val="dash"/>
           </a:ln>
         </p:spPr>
@@ -6659,7 +6890,7 @@
             <a:r>
               <a:rPr sz="1200" b="0" i="0">
                 <a:solidFill>
-                  <a:srgbClr val="115F5B"/>
+                  <a:srgbClr val="8E8780"/>
                 </a:solidFill>
               </a:rPr>
               <a:t>사진 8</a:t>
@@ -6678,6 +6909,14 @@
 <file path=ppt/slides/slide6.xml><?xml version="1.0" encoding="utf-8"?>
 <p:sld xmlns:a="http://schemas.openxmlformats.org/drawingml/2006/main" xmlns:p="http://schemas.openxmlformats.org/presentationml/2006/main" xmlns:r="http://schemas.openxmlformats.org/officeDocument/2006/relationships">
   <p:cSld>
+    <p:bg>
+      <p:bgPr>
+        <a:solidFill>
+          <a:srgbClr val="EAFDF4"/>
+        </a:solidFill>
+        <a:effectLst/>
+      </p:bgPr>
+    </p:bg>
     <p:spTree>
       <p:nvGrpSpPr>
         <p:cNvPr id="1" name=""/>
@@ -6685,30 +6924,119 @@
         <p:nvPr/>
       </p:nvGrpSpPr>
       <p:grpSpPr/>
-      <p:pic>
-        <p:nvPicPr>
-          <p:cNvPr id="3" name="표지 그림" descr="birthday-21.jpg"/>
-          <p:cNvPicPr>
-            <a:picLocks noChangeAspect="1"/>
-          </p:cNvPicPr>
+      <p:sp>
+        <p:nvSpPr>
+          <p:cNvPr id="3" name="사진 자리"/>
+          <p:cNvSpPr/>
           <p:nvPr/>
-        </p:nvPicPr>
-        <p:blipFill>
-          <a:blip r:embed="rId2"/>
-          <a:stretch>
-            <a:fillRect/>
-          </a:stretch>
-        </p:blipFill>
-        <p:spPr>
-          <a:xfrm>
-            <a:off x="0" y="0"/>
-            <a:ext cx="12191695" cy="6858000"/>
+        </p:nvSpPr>
+        <p:spPr>
+          <a:xfrm>
+            <a:off x="7558851" y="685800"/>
+            <a:ext cx="3169840" cy="5486400"/>
+          </a:xfrm>
+          <a:prstGeom prst="round2SameRect">
+            <a:avLst>
+              <a:gd name="adj1" fmla="val 50000"/>
+              <a:gd name="adj2" fmla="val 0"/>
+            </a:avLst>
+          </a:prstGeom>
+          <a:solidFill>
+            <a:srgbClr val="A5F3CC"/>
+          </a:solidFill>
+          <a:ln>
+            <a:noFill/>
+          </a:ln>
+        </p:spPr>
+        <p:txBody>
+          <a:bodyPr rtlCol="0" anchor="ctr" wrap="square" lIns="54864" rIns="54864" tIns="27432" bIns="27432">
+            <a:noAutofit/>
+          </a:bodyPr>
+          <a:lstStyle/>
+          <a:p>
+            <a:pPr algn="ctr">
+              <a:lnSpc>
+                <a:spcPct val="100000"/>
+              </a:lnSpc>
+            </a:pPr>
+            <a:r>
+              <a:rPr sz="1400" b="0" i="0">
+                <a:solidFill>
+                  <a:srgbClr val="274938"/>
+                </a:solidFill>
+              </a:rPr>
+              <a:t>사진을 넣어 주세요</a:t>
+            </a:r>
+          </a:p>
+        </p:txBody>
+      </p:sp>
+      <p:sp>
+        <p:nvSpPr>
+          <p:cNvPr id="4" name="장식"/>
+          <p:cNvSpPr/>
+          <p:nvPr/>
+        </p:nvSpPr>
+        <p:spPr>
+          <a:xfrm>
+            <a:off x="6827349" y="4251960"/>
+            <a:ext cx="1005840" cy="1005840"/>
+          </a:xfrm>
+          <a:prstGeom prst="ellipse">
+            <a:avLst/>
+          </a:prstGeom>
+          <a:solidFill>
+            <a:srgbClr val="A5F3CC"/>
+          </a:solidFill>
+          <a:ln>
+            <a:noFill/>
+          </a:ln>
+        </p:spPr>
+        <p:txBody>
+          <a:bodyPr rtlCol="0" anchor="ctr"/>
+          <a:lstStyle/>
+          <a:p>
+            <a:pPr algn="ctr"/>
+          </a:p>
+        </p:txBody>
+      </p:sp>
+      <p:sp>
+        <p:nvSpPr>
+          <p:cNvPr id="5" name="라벨"/>
+          <p:cNvSpPr txBox="1"/>
+          <p:nvPr/>
+        </p:nvSpPr>
+        <p:spPr>
+          <a:xfrm>
+            <a:off x="822960" y="2148840"/>
+            <a:ext cx="5608179" cy="274320"/>
           </a:xfrm>
           <a:prstGeom prst="rect">
             <a:avLst/>
           </a:prstGeom>
-        </p:spPr>
-      </p:pic>
+          <a:noFill/>
+        </p:spPr>
+        <p:txBody>
+          <a:bodyPr wrap="square" lIns="54864" rIns="54864" tIns="27432" bIns="27432" anchor="t">
+            <a:noAutofit/>
+          </a:bodyPr>
+          <a:lstStyle/>
+          <a:p>
+            <a:pPr algn="l">
+              <a:lnSpc>
+                <a:spcPct val="115000"/>
+              </a:lnSpc>
+            </a:pPr>
+            <a:r>
+              <a:rPr sz="1000" b="1" i="0" spc="250">
+                <a:solidFill>
+                  <a:srgbClr val="26231F"/>
+                </a:solidFill>
+              </a:rPr>
+              <a:t>FIRST BIRTHDAY</a:t>
+            </a:r>
+          </a:p>
+        </p:txBody>
+      </p:sp>
       <p:sp>
         <p:nvSpPr>
           <p:cNvPr id="2" name="Title 1"/>
@@ -6721,8 +7049,8 @@
         </p:nvSpPr>
         <p:spPr>
           <a:xfrm>
-            <a:off x="853418" y="2057400"/>
-            <a:ext cx="6095847" cy="1554480"/>
+            <a:off x="822960" y="2606040"/>
+            <a:ext cx="5608179" cy="1188720"/>
           </a:xfrm>
         </p:spPr>
         <p:txBody>
@@ -6739,7 +7067,7 @@
             <a:r>
               <a:rPr sz="3400" b="1" i="0">
                 <a:solidFill>
-                  <a:srgbClr val="115F5B"/>
+                  <a:srgbClr val="26231F"/>
                 </a:solidFill>
               </a:rPr>
               <a:t>와 주셔서 고맙습니다</a:t>
@@ -6749,14 +7077,14 @@
       </p:sp>
       <p:sp>
         <p:nvSpPr>
-          <p:cNvPr id="4" name="한 줄 문구"/>
+          <p:cNvPr id="6" name="한 줄 문구"/>
           <p:cNvSpPr txBox="1"/>
           <p:nvPr/>
         </p:nvSpPr>
         <p:spPr>
           <a:xfrm>
-            <a:off x="853418" y="3749039"/>
-            <a:ext cx="6095847" cy="822960"/>
+            <a:off x="822960" y="3886200"/>
+            <a:ext cx="5608179" cy="822960"/>
           </a:xfrm>
           <a:prstGeom prst="rect">
             <a:avLst/>
@@ -6775,9 +7103,9 @@
               </a:lnSpc>
             </a:pPr>
             <a:r>
-              <a:rPr sz="1700" b="0" i="1">
+              <a:rPr sz="1700" b="0" i="0">
                 <a:solidFill>
-                  <a:srgbClr val="115F5B"/>
+                  <a:srgbClr val="26231F"/>
                 </a:solidFill>
               </a:rPr>
               <a:t>아이가 한 살이 되었습니다</a:t>
@@ -6787,14 +7115,14 @@
       </p:sp>
       <p:sp>
         <p:nvSpPr>
-          <p:cNvPr id="5" name="안내 문구"/>
+          <p:cNvPr id="7" name="안내 문구"/>
           <p:cNvSpPr txBox="1"/>
           <p:nvPr/>
         </p:nvSpPr>
         <p:spPr>
           <a:xfrm>
-            <a:off x="853418" y="4617720"/>
-            <a:ext cx="6095847" cy="914400"/>
+            <a:off x="822960" y="4754880"/>
+            <a:ext cx="5608179" cy="914400"/>
           </a:xfrm>
           <a:prstGeom prst="rect">
             <a:avLst/>
@@ -6815,7 +7143,7 @@
             <a:r>
               <a:rPr sz="1400" b="0" i="0">
                 <a:solidFill>
-                  <a:srgbClr val="666666"/>
+                  <a:srgbClr val="26231F"/>
                 </a:solidFill>
               </a:rPr>
               <a:t>아기 이름 · 부모 이름</a:t>
@@ -6842,34 +7170,34 @@
         <a:sysClr val="window" lastClr="FFFFFF"/>
       </a:lt1>
       <a:dk2>
-        <a:srgbClr val="115F5B"/>
+        <a:srgbClr val="274938"/>
       </a:dk2>
       <a:lt2>
-        <a:srgbClr val="EEFCFB"/>
+        <a:srgbClr val="EAFDF4"/>
       </a:lt2>
       <a:accent1>
-        <a:srgbClr val="26C5BD"/>
+        <a:srgbClr val="7BEAB3"/>
       </a:accent1>
       <a:accent2>
-        <a:srgbClr val="209DB6"/>
+        <a:srgbClr val="9FEFED"/>
       </a:accent2>
       <a:accent3>
-        <a:srgbClr val="115F5B"/>
+        <a:srgbClr val="274938"/>
       </a:accent3>
       <a:accent4>
-        <a:srgbClr val="D1FAF8"/>
+        <a:srgbClr val="D1FAE6"/>
       </a:accent4>
       <a:accent5>
-        <a:srgbClr val="23B1BA"/>
+        <a:srgbClr val="8DECD0"/>
       </a:accent5>
       <a:accent6>
-        <a:srgbClr val="709F9D"/>
+        <a:srgbClr val="7D9288"/>
       </a:accent6>
       <a:hlink>
-        <a:srgbClr val="26C5BD"/>
+        <a:srgbClr val="7BEAB3"/>
       </a:hlink>
       <a:folHlink>
-        <a:srgbClr val="115F5B"/>
+        <a:srgbClr val="274938"/>
       </a:folHlink>
     </a:clrScheme>
     <a:fontScheme name="Office">
